--- a/site/guide.pptx
+++ b/site/guide.pptx
@@ -15,9 +15,13 @@
     <p:sldId id="263" r:id="rId9"/>
     <p:sldId id="264" r:id="rId10"/>
     <p:sldId id="265" r:id="rId11"/>
+    <p:sldId id="266" r:id="rId12"/>
+    <p:sldId id="267" r:id="rId13"/>
+    <p:sldId id="268" r:id="rId14"/>
+    <p:sldId id="269" r:id="rId15"/>
   </p:sldIdLst>
   <p:notesMasterIdLst>
-    <p:notesMasterId r:id="rId12"/>
+    <p:notesMasterId r:id="rId16"/>
   </p:notesMasterIdLst>
   <p:sldSz cx="12192000" cy="6858000"/>
   <p:notesSz cx="6858000" cy="12192000"/>
@@ -599,7 +603,7 @@
           <a:p>
             <a:r>
               <a:rPr lang="en-US" dirty="0"/>
-              <a:t>ご意見は GitHub の Issue へ。</a:t>
+              <a:t>PowerPoint で図を引き伸ばすと文字も伸びてしまいますが、作り直すと文字は指定の大きさに戻ります。</a:t>
             </a:r>
             <a:endParaRPr lang="en-US" dirty="0"/>
           </a:p>
@@ -623,6 +627,358 @@
             <a:fld id="{F7021451-1387-4CA6-816F-3879F97B5CBC}" type="slidenum">
               <a:rPr lang="en-US"/>
               <a:t>10</a:t>
+            </a:fld>
+            <a:endParaRPr lang="en-US"/>
+          </a:p>
+        </p:txBody>
+      </p:sp>
+    </p:spTree>
+    <p:extLst>
+      <p:ext uri="{BB962C8B-B14F-4D97-AF65-F5344CB8AC3E}">
+        <p14:creationId xmlns:p14="http://schemas.microsoft.com/office/powerpoint/2010/main" val="1024086991"/>
+      </p:ext>
+    </p:extLst>
+  </p:cSld>
+  <p:clrMapOvr>
+    <a:masterClrMapping/>
+  </p:clrMapOvr>
+</p:notes>
+</file>
+
+<file path=ppt/notesSlides/notesSlide11.xml><?xml version="1.0" encoding="utf-8"?>
+<p:notes xmlns:a="http://schemas.openxmlformats.org/drawingml/2006/main" xmlns:r="http://schemas.openxmlformats.org/officeDocument/2006/relationships" xmlns:p="http://schemas.openxmlformats.org/presentationml/2006/main">
+  <p:cSld>
+    <p:spTree>
+      <p:nvGrpSpPr>
+        <p:cNvPr id="1" name=""/>
+        <p:cNvGrpSpPr/>
+        <p:nvPr/>
+      </p:nvGrpSpPr>
+      <p:grpSpPr>
+        <a:xfrm>
+          <a:off x="0" y="0"/>
+          <a:ext cx="0" cy="0"/>
+          <a:chOff x="0" y="0"/>
+          <a:chExt cx="0" cy="0"/>
+        </a:xfrm>
+      </p:grpSpPr>
+      <p:sp>
+        <p:nvSpPr>
+          <p:cNvPr id="2" name="Slide Image Placeholder 1"/>
+          <p:cNvSpPr>
+            <a:spLocks noGrp="1" noRot="1" noChangeAspect="1"/>
+          </p:cNvSpPr>
+          <p:nvPr>
+            <p:ph type="sldImg"/>
+          </p:nvPr>
+        </p:nvSpPr>
+        <p:spPr/>
+      </p:sp>
+      <p:sp>
+        <p:nvSpPr>
+          <p:cNvPr id="3" name="Notes Placeholder 2"/>
+          <p:cNvSpPr>
+            <a:spLocks noGrp="1"/>
+          </p:cNvSpPr>
+          <p:nvPr>
+            <p:ph type="body" idx="1"/>
+          </p:nvPr>
+        </p:nvSpPr>
+        <p:spPr/>
+        <p:txBody>
+          <a:bodyPr/>
+          <a:lstStyle/>
+          <a:p>
+            <a:r>
+              <a:rPr lang="en-US" dirty="0"/>
+              <a:t>ノートを書き換えて図の形が変わったときは、重ねた図形の位置は自分で合わせてください。グループは 1 段まで対応しています。</a:t>
+            </a:r>
+            <a:endParaRPr lang="en-US" dirty="0"/>
+          </a:p>
+        </p:txBody>
+      </p:sp>
+      <p:sp>
+        <p:nvSpPr>
+          <p:cNvPr id="4" name="Slide Number Placeholder 3"/>
+          <p:cNvSpPr>
+            <a:spLocks noGrp="1"/>
+          </p:cNvSpPr>
+          <p:nvPr>
+            <p:ph type="sldNum" sz="quarter" idx="10"/>
+          </p:nvPr>
+        </p:nvSpPr>
+        <p:spPr/>
+        <p:txBody>
+          <a:bodyPr/>
+          <a:lstStyle/>
+          <a:p>
+            <a:fld id="{F7021451-1387-4CA6-816F-3879F97B5CBC}" type="slidenum">
+              <a:rPr lang="en-US"/>
+              <a:t>11</a:t>
+            </a:fld>
+            <a:endParaRPr lang="en-US"/>
+          </a:p>
+        </p:txBody>
+      </p:sp>
+    </p:spTree>
+    <p:extLst>
+      <p:ext uri="{BB962C8B-B14F-4D97-AF65-F5344CB8AC3E}">
+        <p14:creationId xmlns:p14="http://schemas.microsoft.com/office/powerpoint/2010/main" val="1024086991"/>
+      </p:ext>
+    </p:extLst>
+  </p:cSld>
+  <p:clrMapOvr>
+    <a:masterClrMapping/>
+  </p:clrMapOvr>
+</p:notes>
+</file>
+
+<file path=ppt/notesSlides/notesSlide12.xml><?xml version="1.0" encoding="utf-8"?>
+<p:notes xmlns:a="http://schemas.openxmlformats.org/drawingml/2006/main" xmlns:r="http://schemas.openxmlformats.org/officeDocument/2006/relationships" xmlns:p="http://schemas.openxmlformats.org/presentationml/2006/main">
+  <p:cSld>
+    <p:spTree>
+      <p:nvGrpSpPr>
+        <p:cNvPr id="1" name=""/>
+        <p:cNvGrpSpPr/>
+        <p:nvPr/>
+      </p:nvGrpSpPr>
+      <p:grpSpPr>
+        <a:xfrm>
+          <a:off x="0" y="0"/>
+          <a:ext cx="0" cy="0"/>
+          <a:chOff x="0" y="0"/>
+          <a:chExt cx="0" cy="0"/>
+        </a:xfrm>
+      </p:grpSpPr>
+      <p:sp>
+        <p:nvSpPr>
+          <p:cNvPr id="2" name="Slide Image Placeholder 1"/>
+          <p:cNvSpPr>
+            <a:spLocks noGrp="1" noRot="1" noChangeAspect="1"/>
+          </p:cNvSpPr>
+          <p:nvPr>
+            <p:ph type="sldImg"/>
+          </p:nvPr>
+        </p:nvSpPr>
+        <p:spPr/>
+      </p:sp>
+      <p:sp>
+        <p:nvSpPr>
+          <p:cNvPr id="3" name="Notes Placeholder 2"/>
+          <p:cNvSpPr>
+            <a:spLocks noGrp="1"/>
+          </p:cNvSpPr>
+          <p:nvPr>
+            <p:ph type="body" idx="1"/>
+          </p:nvPr>
+        </p:nvSpPr>
+        <p:spPr/>
+        <p:txBody>
+          <a:bodyPr/>
+          <a:lstStyle/>
+          <a:p>
+            <a:r>
+              <a:rPr lang="en-US" dirty="0"/>
+              <a:t>このスライドの見本はテーマを比べるための画像で、アドインの管理対象ではありません。</a:t>
+            </a:r>
+            <a:endParaRPr lang="en-US" dirty="0"/>
+          </a:p>
+        </p:txBody>
+      </p:sp>
+      <p:sp>
+        <p:nvSpPr>
+          <p:cNvPr id="4" name="Slide Number Placeholder 3"/>
+          <p:cNvSpPr>
+            <a:spLocks noGrp="1"/>
+          </p:cNvSpPr>
+          <p:nvPr>
+            <p:ph type="sldNum" sz="quarter" idx="10"/>
+          </p:nvPr>
+        </p:nvSpPr>
+        <p:spPr/>
+        <p:txBody>
+          <a:bodyPr/>
+          <a:lstStyle/>
+          <a:p>
+            <a:fld id="{F7021451-1387-4CA6-816F-3879F97B5CBC}" type="slidenum">
+              <a:rPr lang="en-US"/>
+              <a:t>12</a:t>
+            </a:fld>
+            <a:endParaRPr lang="en-US"/>
+          </a:p>
+        </p:txBody>
+      </p:sp>
+    </p:spTree>
+    <p:extLst>
+      <p:ext uri="{BB962C8B-B14F-4D97-AF65-F5344CB8AC3E}">
+        <p14:creationId xmlns:p14="http://schemas.microsoft.com/office/powerpoint/2010/main" val="1024086991"/>
+      </p:ext>
+    </p:extLst>
+  </p:cSld>
+  <p:clrMapOvr>
+    <a:masterClrMapping/>
+  </p:clrMapOvr>
+</p:notes>
+</file>
+
+<file path=ppt/notesSlides/notesSlide13.xml><?xml version="1.0" encoding="utf-8"?>
+<p:notes xmlns:a="http://schemas.openxmlformats.org/drawingml/2006/main" xmlns:r="http://schemas.openxmlformats.org/officeDocument/2006/relationships" xmlns:p="http://schemas.openxmlformats.org/presentationml/2006/main">
+  <p:cSld>
+    <p:spTree>
+      <p:nvGrpSpPr>
+        <p:cNvPr id="1" name=""/>
+        <p:cNvGrpSpPr/>
+        <p:nvPr/>
+      </p:nvGrpSpPr>
+      <p:grpSpPr>
+        <a:xfrm>
+          <a:off x="0" y="0"/>
+          <a:ext cx="0" cy="0"/>
+          <a:chOff x="0" y="0"/>
+          <a:chExt cx="0" cy="0"/>
+        </a:xfrm>
+      </p:grpSpPr>
+      <p:sp>
+        <p:nvSpPr>
+          <p:cNvPr id="2" name="Slide Image Placeholder 1"/>
+          <p:cNvSpPr>
+            <a:spLocks noGrp="1" noRot="1" noChangeAspect="1"/>
+          </p:cNvSpPr>
+          <p:nvPr>
+            <p:ph type="sldImg"/>
+          </p:nvPr>
+        </p:nvSpPr>
+        <p:spPr/>
+      </p:sp>
+      <p:sp>
+        <p:nvSpPr>
+          <p:cNvPr id="3" name="Notes Placeholder 2"/>
+          <p:cNvSpPr>
+            <a:spLocks noGrp="1"/>
+          </p:cNvSpPr>
+          <p:nvPr>
+            <p:ph type="body" idx="1"/>
+          </p:nvPr>
+        </p:nvSpPr>
+        <p:spPr/>
+        <p:txBody>
+          <a:bodyPr/>
+          <a:lstStyle/>
+          <a:p>
+            <a:r>
+              <a:rPr lang="en-US" dirty="0"/>
+              <a:t>不具合や要望は GitHub（github.com/yoohey/mermaidOnPptx）の Issue へお願いします。</a:t>
+            </a:r>
+            <a:endParaRPr lang="en-US" dirty="0"/>
+          </a:p>
+        </p:txBody>
+      </p:sp>
+      <p:sp>
+        <p:nvSpPr>
+          <p:cNvPr id="4" name="Slide Number Placeholder 3"/>
+          <p:cNvSpPr>
+            <a:spLocks noGrp="1"/>
+          </p:cNvSpPr>
+          <p:nvPr>
+            <p:ph type="sldNum" sz="quarter" idx="10"/>
+          </p:nvPr>
+        </p:nvSpPr>
+        <p:spPr/>
+        <p:txBody>
+          <a:bodyPr/>
+          <a:lstStyle/>
+          <a:p>
+            <a:fld id="{F7021451-1387-4CA6-816F-3879F97B5CBC}" type="slidenum">
+              <a:rPr lang="en-US"/>
+              <a:t>13</a:t>
+            </a:fld>
+            <a:endParaRPr lang="en-US"/>
+          </a:p>
+        </p:txBody>
+      </p:sp>
+    </p:spTree>
+    <p:extLst>
+      <p:ext uri="{BB962C8B-B14F-4D97-AF65-F5344CB8AC3E}">
+        <p14:creationId xmlns:p14="http://schemas.microsoft.com/office/powerpoint/2010/main" val="1024086991"/>
+      </p:ext>
+    </p:extLst>
+  </p:cSld>
+  <p:clrMapOvr>
+    <a:masterClrMapping/>
+  </p:clrMapOvr>
+</p:notes>
+</file>
+
+<file path=ppt/notesSlides/notesSlide14.xml><?xml version="1.0" encoding="utf-8"?>
+<p:notes xmlns:a="http://schemas.openxmlformats.org/drawingml/2006/main" xmlns:r="http://schemas.openxmlformats.org/officeDocument/2006/relationships" xmlns:p="http://schemas.openxmlformats.org/presentationml/2006/main">
+  <p:cSld>
+    <p:spTree>
+      <p:nvGrpSpPr>
+        <p:cNvPr id="1" name=""/>
+        <p:cNvGrpSpPr/>
+        <p:nvPr/>
+      </p:nvGrpSpPr>
+      <p:grpSpPr>
+        <a:xfrm>
+          <a:off x="0" y="0"/>
+          <a:ext cx="0" cy="0"/>
+          <a:chOff x="0" y="0"/>
+          <a:chExt cx="0" cy="0"/>
+        </a:xfrm>
+      </p:grpSpPr>
+      <p:sp>
+        <p:nvSpPr>
+          <p:cNvPr id="2" name="Slide Image Placeholder 1"/>
+          <p:cNvSpPr>
+            <a:spLocks noGrp="1" noRot="1" noChangeAspect="1"/>
+          </p:cNvSpPr>
+          <p:nvPr>
+            <p:ph type="sldImg"/>
+          </p:nvPr>
+        </p:nvSpPr>
+        <p:spPr/>
+      </p:sp>
+      <p:sp>
+        <p:nvSpPr>
+          <p:cNvPr id="3" name="Notes Placeholder 2"/>
+          <p:cNvSpPr>
+            <a:spLocks noGrp="1"/>
+          </p:cNvSpPr>
+          <p:nvPr>
+            <p:ph type="body" idx="1"/>
+          </p:nvPr>
+        </p:nvSpPr>
+        <p:spPr/>
+        <p:txBody>
+          <a:bodyPr/>
+          <a:lstStyle/>
+          <a:p>
+            <a:r>
+              <a:rPr lang="en-US" dirty="0"/>
+              <a:t>ご意見は GitHub の Issue へ。</a:t>
+            </a:r>
+            <a:endParaRPr lang="en-US" dirty="0"/>
+          </a:p>
+        </p:txBody>
+      </p:sp>
+      <p:sp>
+        <p:nvSpPr>
+          <p:cNvPr id="4" name="Slide Number Placeholder 3"/>
+          <p:cNvSpPr>
+            <a:spLocks noGrp="1"/>
+          </p:cNvSpPr>
+          <p:nvPr>
+            <p:ph type="sldNum" sz="quarter" idx="10"/>
+          </p:nvPr>
+        </p:nvSpPr>
+        <p:spPr/>
+        <p:txBody>
+          <a:bodyPr/>
+          <a:lstStyle/>
+          <a:p>
+            <a:fld id="{F7021451-1387-4CA6-816F-3879F97B5CBC}" type="slidenum">
+              <a:rPr lang="en-US"/>
+              <a:t>14</a:t>
             </a:fld>
             <a:endParaRPr lang="en-US"/>
           </a:p>
@@ -968,7 +1324,7 @@
           <a:p>
             <a:r>
               <a:rPr lang="en-US" dirty="0"/>
-              <a:t>左の例をノートに貼り付けて「図を生成」を押すと、シーケンス図ができます。</a:t>
+              <a:t>画面は実際の操作を録画したものです（スライドショーや編集画面で動きます）。</a:t>
             </a:r>
             <a:endParaRPr lang="en-US" dirty="0"/>
           </a:p>
@@ -1056,7 +1412,8 @@
           <a:p>
             <a:r>
               <a:rPr lang="en-US" dirty="0"/>
-              <a:t>Mermaid グループはホームタブの右端にあります。</a:t>
+              <a:t>左の例をノートに貼り付けて「図を生成」を押すと、シーケンス図ができます。
+1つのノートにブロックをいくつでも書けます。ブロックごとに別の図になり、メモと混ぜて書けます。</a:t>
             </a:r>
             <a:endParaRPr lang="en-US" dirty="0"/>
           </a:p>
@@ -1144,15 +1501,8 @@
           <a:p>
             <a:r>
               <a:rPr lang="en-US" dirty="0"/>
-              <a:t>構文エラーのブロックは図に触らず、ほかのブロックだけを処理します。
-```mermaid id=update
-flowchart LR
-  N["ノートの&lt;br/&gt;mermaid ブロック"] --&gt; Q1{"同じ id の図が&lt;br/&gt;ある？"}
-  Q1 -- ない --&gt; ADD["新しく図を入れる"]
-  Q1 -- ある --&gt; Q2{"コードとテーマが&lt;br/&gt;前と同じ？"}
-  Q2 -- 同じ --&gt; KEEP["何もしない"]
-  Q2 -- 違う --&gt; REP["位置と横幅を保って&lt;br/&gt;置き換える"]
-```</a:t>
+              <a:t>Mermaid グループはホームタブの右端にあります。
+時間がかかるとき（0.3 秒以上）は、パネルに進み具合とキャンセルボタンが出ます。</a:t>
             </a:r>
             <a:endParaRPr lang="en-US" dirty="0"/>
           </a:p>
@@ -1240,7 +1590,8 @@
           <a:p>
             <a:r>
               <a:rPr lang="en-US" dirty="0"/>
-              <a:t>このスライドの見本はテーマを比べるための画像で、アドインの管理対象ではありません。</a:t>
+              <a:t>時間がかかるとき（0.3 秒以上）は、パネルに進み具合とキャンセルボタンが出ます。
+「変更が無い図も作り直す」に☑すると、変更が無い図も作り直します。</a:t>
             </a:r>
             <a:endParaRPr lang="en-US" dirty="0"/>
           </a:p>
@@ -1328,7 +1679,16 @@
           <a:p>
             <a:r>
               <a:rPr lang="en-US" dirty="0"/>
-              <a:t>不具合や要望は GitHub（github.com/yoohey/mermaidOnPptx）の Issue へお願いします。</a:t>
+              <a:t>構文エラーのブロックは図に触らず、ほかのブロックだけを処理します。
+図の大きさを変えたときは、大きさも「前と違う」に入ります（次の枚を参照）。
+```mermaid id=update
+flowchart LR
+  N["ノートの&lt;br/&gt;mermaid ブロック"] --&gt; Q1{"同じ id の図が&lt;br/&gt;ある？"}
+  Q1 -- ない --&gt; ADD["新しく図を入れる"]
+  Q1 -- ある --&gt; Q2{"コード・テーマ・&lt;br/&gt;大きさが前と同じ？"}
+  Q2 -- 同じ --&gt; KEEP["何もしない"]
+  Q2 -- 違う --&gt; REP["位置と大きさを保って&lt;br/&gt;置き換える"]
+```</a:t>
             </a:r>
             <a:endParaRPr lang="en-US" dirty="0"/>
           </a:p>
@@ -2108,7 +2468,7 @@
                   <a:schemeClr val="accent4"/>
                 </a:solidFill>
               </a:rPr>
-              <a:t>利用ガイド ／ 2026年10月版</a:t>
+              <a:t>利用ガイド ／ v1.1.0（2026年10月）</a:t>
             </a:r>
             <a:endParaRPr lang="en-US" sz="1400" dirty="0"/>
           </a:p>
@@ -2223,6 +2583,1455 @@
       <p:sp>
         <p:nvSpPr>
           <p:cNvPr id="2" name="Text 0"/>
+          <p:cNvSpPr/>
+          <p:nvPr>
+            <p:ph idx="100" type="title" hasCustomPrompt="1"/>
+          </p:nvPr>
+        </p:nvSpPr>
+        <p:spPr>
+          <a:xfrm>
+            <a:off x="548640" y="365760"/>
+            <a:ext cx="11094415" cy="822960"/>
+          </a:xfrm>
+          <a:prstGeom prst="rect">
+            <a:avLst/>
+          </a:prstGeom>
+          <a:noFill/>
+          <a:ln/>
+        </p:spPr>
+        <p:txBody>
+          <a:bodyPr wrap="square" lIns="0" tIns="0" rIns="0" bIns="0" rtlCol="0" anchor="ctr"/>
+          <a:lstStyle/>
+          <a:p>
+            <a:pPr indent="0" marL="0">
+              <a:buNone/>
+            </a:pPr>
+            <a:r>
+              <a:rPr lang="en-US" sz="3200" b="1" dirty="0">
+                <a:solidFill>
+                  <a:schemeClr val="tx2"/>
+                </a:solidFill>
+              </a:rPr>
+              <a:t>大きさを変えても、文字はそのまま</a:t>
+            </a:r>
+            <a:endParaRPr lang="en-US" sz="3200" dirty="0"/>
+          </a:p>
+        </p:txBody>
+      </p:sp>
+      <p:pic>
+        <p:nvPicPr>
+          <p:cNvPr id="3" name="Image 0" descr="画面: C-resize">    </p:cNvPr>
+          <p:cNvPicPr>
+            <a:picLocks noChangeAspect="1"/>
+          </p:cNvPicPr>
+          <p:nvPr/>
+        </p:nvPicPr>
+        <p:blipFill>
+          <a:blip r:embed="rId1"/>
+          <a:stretch>
+            <a:fillRect/>
+          </a:stretch>
+        </p:blipFill>
+        <p:spPr>
+          <a:xfrm>
+            <a:off x="548640" y="1340739"/>
+            <a:ext cx="7863840" cy="4816602"/>
+          </a:xfrm>
+          <a:prstGeom prst="rect">
+            <a:avLst/>
+          </a:prstGeom>
+        </p:spPr>
+      </p:pic>
+      <p:sp>
+        <p:nvSpPr>
+          <p:cNvPr id="4" name="Shape 1"/>
+          <p:cNvSpPr/>
+          <p:nvPr/>
+        </p:nvSpPr>
+        <p:spPr>
+          <a:xfrm>
+            <a:off x="548640" y="1340739"/>
+            <a:ext cx="7863840" cy="4816602"/>
+          </a:xfrm>
+          <a:prstGeom prst="rect">
+            <a:avLst/>
+          </a:prstGeom>
+          <a:ln w="9525">
+            <a:solidFill>
+              <a:srgbClr val="CBD5E1"/>
+            </a:solidFill>
+            <a:prstDash val="solid"/>
+          </a:ln>
+        </p:spPr>
+      </p:sp>
+      <p:sp>
+        <p:nvSpPr>
+          <p:cNvPr id="5" name="Text 2"/>
+          <p:cNvSpPr txBox="1"/>
+          <p:nvPr/>
+        </p:nvSpPr>
+        <p:spPr>
+          <a:xfrm>
+            <a:off x="8732520" y="1463040"/>
+            <a:ext cx="2910535" cy="4572000"/>
+          </a:xfrm>
+          <a:prstGeom prst="rect">
+            <a:avLst/>
+          </a:prstGeom>
+          <a:noFill/>
+          <a:ln/>
+        </p:spPr>
+        <p:txBody>
+          <a:bodyPr wrap="square" lIns="0" tIns="0" rIns="0" bIns="0" rtlCol="0" anchor="t"/>
+          <a:lstStyle/>
+          <a:p>
+            <a:pPr indent="0" marL="0">
+              <a:spcAft>
+                <a:spcPts val="1000"/>
+              </a:spcAft>
+              <a:buNone/>
+            </a:pPr>
+            <a:r>
+              <a:rPr lang="en-US" sz="1400" b="1" dirty="0">
+                <a:solidFill>
+                  <a:schemeClr val="tx1"/>
+                </a:solidFill>
+              </a:rPr>
+              <a:t>図の角をドラッグして広げ、もう一度「図を生成」。</a:t>
+            </a:r>
+            <a:endParaRPr lang="en-US" sz="1400" dirty="0"/>
+          </a:p>
+          <a:p>
+            <a:pPr marL="342900" indent="-342900">
+              <a:spcAft>
+                <a:spcPts val="1000"/>
+              </a:spcAft>
+              <a:buSzPct val="100000"/>
+              <a:buChar char="•"/>
+            </a:pPr>
+            <a:r>
+              <a:rPr lang="en-US" sz="1400" dirty="0">
+                <a:solidFill>
+                  <a:schemeClr val="tx1"/>
+                </a:solidFill>
+              </a:rPr>
+              <a:t>文字の大きさは変えずに、箱と箱の間を広げて枠いっぱいに描き直します</a:t>
+            </a:r>
+            <a:endParaRPr lang="en-US" sz="1400" dirty="0"/>
+          </a:p>
+          <a:p>
+            <a:pPr marL="342900" indent="-342900">
+              <a:spcAft>
+                <a:spcPts val="1000"/>
+              </a:spcAft>
+              <a:buSzPct val="100000"/>
+              <a:buChar char="•"/>
+            </a:pPr>
+            <a:r>
+              <a:rPr lang="en-US" sz="1400" dirty="0">
+                <a:solidFill>
+                  <a:schemeClr val="tx1"/>
+                </a:solidFill>
+              </a:rPr>
+              <a:t>収まらないときは縮め、縮めても横いっぱいに広げます</a:t>
+            </a:r>
+            <a:endParaRPr lang="en-US" sz="1400" dirty="0"/>
+          </a:p>
+          <a:p>
+            <a:pPr marL="342900" indent="-342900">
+              <a:spcAft>
+                <a:spcPts val="1000"/>
+              </a:spcAft>
+              <a:buSzPct val="100000"/>
+              <a:buChar char="•"/>
+            </a:pPr>
+            <a:r>
+              <a:rPr lang="en-US" sz="1400" dirty="0">
+                <a:solidFill>
+                  <a:schemeClr val="tx1"/>
+                </a:solidFill>
+              </a:rPr>
+              <a:t>円グラフ・マインドマップ、縦一列の図の幅は広がりません</a:t>
+            </a:r>
+            <a:endParaRPr lang="en-US" sz="1400" dirty="0"/>
+          </a:p>
+        </p:txBody>
+      </p:sp>
+      <p:sp>
+        <p:nvSpPr>
+          <p:cNvPr id="25" name="Slide Number Placeholder 0"/>
+          <p:cNvSpPr>
+            <a:spLocks noGrp="1"/>
+          </p:cNvSpPr>
+          <p:nvPr>
+            <p:ph type="sldNum" sz="quarter" idx="4294967295"/>
+          </p:nvPr>
+        </p:nvSpPr>
+        <p:spPr>
+          <a:xfrm>
+            <a:off x="11277295" y="6400800"/>
+            <a:ext cx="457200" cy="274320"/>
+          </a:xfrm>
+          <a:prstGeom prst="rect">
+            <a:avLst/>
+          </a:prstGeom>
+          <a:extLst>
+            <a:ext uri="{C572A759-6A51-4108-AA02-DFA0A04FC94B}">
+              <ma14:wrappingTextBoxFlag xmlns:ma14="http://schemas.microsoft.com/office/mac/drawingml/2011/main" val="0"/>
+            </a:ext>
+          </a:extLst>
+        </p:spPr>
+        <p:txBody>
+          <a:bodyPr/>
+          <a:lstStyle>
+            <a:lvl1pPr>
+              <a:defRPr sz="1000">
+                <a:solidFill>
+                  <a:schemeClr val="accent3"/>
+                </a:solidFill>
+              </a:defRPr>
+            </a:lvl1pPr>
+          </a:lstStyle>
+          <a:p>
+            <a:pPr algn="l"/>
+            <a:fld id="{F7021451-1387-4CA6-816F-3879F97B5CBC}" type="slidenum">
+              <a:rPr b="0" lang="en-US"/>
+              <a:t>10</a:t>
+            </a:fld>
+            <a:endParaRPr lang="en-US"/>
+          </a:p>
+        </p:txBody>
+      </p:sp>
+    </p:spTree>
+  </p:cSld>
+  <p:clrMapOvr>
+    <a:masterClrMapping/>
+  </p:clrMapOvr>
+</p:sld>
+</file>
+
+<file path=ppt/slides/slide11.xml><?xml version="1.0" encoding="utf-8"?>
+<p:sld xmlns:a="http://schemas.openxmlformats.org/drawingml/2006/main" xmlns:r="http://schemas.openxmlformats.org/officeDocument/2006/relationships" xmlns:p="http://schemas.openxmlformats.org/presentationml/2006/main">
+  <p:cSld name="Slide 11">
+    <p:spTree>
+      <p:nvGrpSpPr>
+        <p:cNvPr id="1" name=""/>
+        <p:cNvGrpSpPr/>
+        <p:nvPr/>
+      </p:nvGrpSpPr>
+      <p:grpSpPr>
+        <a:xfrm>
+          <a:off x="0" y="0"/>
+          <a:ext cx="0" cy="0"/>
+          <a:chOff x="0" y="0"/>
+          <a:chExt cx="0" cy="0"/>
+        </a:xfrm>
+      </p:grpSpPr>
+      <p:sp>
+        <p:nvSpPr>
+          <p:cNvPr id="2" name="Text 0"/>
+          <p:cNvSpPr/>
+          <p:nvPr>
+            <p:ph idx="100" type="title" hasCustomPrompt="1"/>
+          </p:nvPr>
+        </p:nvSpPr>
+        <p:spPr>
+          <a:xfrm>
+            <a:off x="548640" y="365760"/>
+            <a:ext cx="11094415" cy="822960"/>
+          </a:xfrm>
+          <a:prstGeom prst="rect">
+            <a:avLst/>
+          </a:prstGeom>
+          <a:noFill/>
+          <a:ln/>
+        </p:spPr>
+        <p:txBody>
+          <a:bodyPr wrap="square" lIns="0" tIns="0" rIns="0" bIns="0" rtlCol="0" anchor="ctr"/>
+          <a:lstStyle/>
+          <a:p>
+            <a:pPr indent="0" marL="0">
+              <a:buNone/>
+            </a:pPr>
+            <a:r>
+              <a:rPr lang="en-US" sz="3200" b="1" dirty="0">
+                <a:solidFill>
+                  <a:schemeClr val="tx2"/>
+                </a:solidFill>
+              </a:rPr>
+              <a:t>図に重ねた丸や矢印は、そのまま</a:t>
+            </a:r>
+            <a:endParaRPr lang="en-US" sz="3200" dirty="0"/>
+          </a:p>
+        </p:txBody>
+      </p:sp>
+      <p:pic>
+        <p:nvPicPr>
+          <p:cNvPr id="3" name="Image 0" descr="画面: L-overlay">    </p:cNvPr>
+          <p:cNvPicPr>
+            <a:picLocks noChangeAspect="1"/>
+          </p:cNvPicPr>
+          <p:nvPr/>
+        </p:nvPicPr>
+        <p:blipFill>
+          <a:blip r:embed="rId1"/>
+          <a:stretch>
+            <a:fillRect/>
+          </a:stretch>
+        </p:blipFill>
+        <p:spPr>
+          <a:xfrm>
+            <a:off x="559199" y="1280160"/>
+            <a:ext cx="11073296" cy="4206240"/>
+          </a:xfrm>
+          <a:prstGeom prst="rect">
+            <a:avLst/>
+          </a:prstGeom>
+        </p:spPr>
+      </p:pic>
+      <p:sp>
+        <p:nvSpPr>
+          <p:cNvPr id="4" name="Shape 1"/>
+          <p:cNvSpPr/>
+          <p:nvPr/>
+        </p:nvSpPr>
+        <p:spPr>
+          <a:xfrm>
+            <a:off x="559199" y="1280160"/>
+            <a:ext cx="11073296" cy="4206240"/>
+          </a:xfrm>
+          <a:prstGeom prst="rect">
+            <a:avLst/>
+          </a:prstGeom>
+          <a:ln w="9525">
+            <a:solidFill>
+              <a:srgbClr val="CBD5E1"/>
+            </a:solidFill>
+            <a:prstDash val="solid"/>
+          </a:ln>
+        </p:spPr>
+      </p:sp>
+      <p:sp>
+        <p:nvSpPr>
+          <p:cNvPr id="5" name="Text 2"/>
+          <p:cNvSpPr txBox="1"/>
+          <p:nvPr/>
+        </p:nvSpPr>
+        <p:spPr>
+          <a:xfrm>
+            <a:off x="548640" y="5623560"/>
+            <a:ext cx="11094415" cy="548640"/>
+          </a:xfrm>
+          <a:prstGeom prst="rect">
+            <a:avLst/>
+          </a:prstGeom>
+          <a:noFill/>
+          <a:ln/>
+        </p:spPr>
+        <p:txBody>
+          <a:bodyPr wrap="square" lIns="0" tIns="0" rIns="0" bIns="0" rtlCol="0" anchor="t"/>
+          <a:lstStyle/>
+          <a:p>
+            <a:pPr indent="0" marL="0">
+              <a:buNone/>
+            </a:pPr>
+            <a:r>
+              <a:rPr lang="en-US" sz="1500" dirty="0">
+                <a:solidFill>
+                  <a:schemeClr val="tx1"/>
+                </a:solidFill>
+              </a:rPr>
+              <a:t>作り直した図は前と同じ重なり順に入るので、上に描いた図形は隠れません。図と図形をグループにしたままでも作り直せます。</a:t>
+            </a:r>
+            <a:endParaRPr lang="en-US" sz="1500" dirty="0"/>
+          </a:p>
+        </p:txBody>
+      </p:sp>
+      <p:sp>
+        <p:nvSpPr>
+          <p:cNvPr id="25" name="Slide Number Placeholder 0"/>
+          <p:cNvSpPr>
+            <a:spLocks noGrp="1"/>
+          </p:cNvSpPr>
+          <p:nvPr>
+            <p:ph type="sldNum" sz="quarter" idx="4294967295"/>
+          </p:nvPr>
+        </p:nvSpPr>
+        <p:spPr>
+          <a:xfrm>
+            <a:off x="11277295" y="6400800"/>
+            <a:ext cx="457200" cy="274320"/>
+          </a:xfrm>
+          <a:prstGeom prst="rect">
+            <a:avLst/>
+          </a:prstGeom>
+          <a:extLst>
+            <a:ext uri="{C572A759-6A51-4108-AA02-DFA0A04FC94B}">
+              <ma14:wrappingTextBoxFlag xmlns:ma14="http://schemas.microsoft.com/office/mac/drawingml/2011/main" val="0"/>
+            </a:ext>
+          </a:extLst>
+        </p:spPr>
+        <p:txBody>
+          <a:bodyPr/>
+          <a:lstStyle>
+            <a:lvl1pPr>
+              <a:defRPr sz="1000">
+                <a:solidFill>
+                  <a:schemeClr val="accent3"/>
+                </a:solidFill>
+              </a:defRPr>
+            </a:lvl1pPr>
+          </a:lstStyle>
+          <a:p>
+            <a:pPr algn="l"/>
+            <a:fld id="{F7021451-1387-4CA6-816F-3879F97B5CBC}" type="slidenum">
+              <a:rPr b="0" lang="en-US"/>
+              <a:t>11</a:t>
+            </a:fld>
+            <a:endParaRPr lang="en-US"/>
+          </a:p>
+        </p:txBody>
+      </p:sp>
+    </p:spTree>
+  </p:cSld>
+  <p:clrMapOvr>
+    <a:masterClrMapping/>
+  </p:clrMapOvr>
+</p:sld>
+</file>
+
+<file path=ppt/slides/slide12.xml><?xml version="1.0" encoding="utf-8"?>
+<p:sld xmlns:a="http://schemas.openxmlformats.org/drawingml/2006/main" xmlns:r="http://schemas.openxmlformats.org/officeDocument/2006/relationships" xmlns:p="http://schemas.openxmlformats.org/presentationml/2006/main">
+  <p:cSld name="Slide 12">
+    <p:spTree>
+      <p:nvGrpSpPr>
+        <p:cNvPr id="1" name=""/>
+        <p:cNvGrpSpPr/>
+        <p:nvPr/>
+      </p:nvGrpSpPr>
+      <p:grpSpPr>
+        <a:xfrm>
+          <a:off x="0" y="0"/>
+          <a:ext cx="0" cy="0"/>
+          <a:chOff x="0" y="0"/>
+          <a:chExt cx="0" cy="0"/>
+        </a:xfrm>
+      </p:grpSpPr>
+      <p:sp>
+        <p:nvSpPr>
+          <p:cNvPr id="2" name="Text 0"/>
+          <p:cNvSpPr/>
+          <p:nvPr>
+            <p:ph idx="100" type="title" hasCustomPrompt="1"/>
+          </p:nvPr>
+        </p:nvSpPr>
+        <p:spPr>
+          <a:xfrm>
+            <a:off x="548640" y="365760"/>
+            <a:ext cx="11094415" cy="822960"/>
+          </a:xfrm>
+          <a:prstGeom prst="rect">
+            <a:avLst/>
+          </a:prstGeom>
+          <a:noFill/>
+          <a:ln/>
+        </p:spPr>
+        <p:txBody>
+          <a:bodyPr wrap="square" lIns="0" tIns="0" rIns="0" bIns="0" rtlCol="0" anchor="ctr"/>
+          <a:lstStyle/>
+          <a:p>
+            <a:pPr indent="0" marL="0">
+              <a:buNone/>
+            </a:pPr>
+            <a:r>
+              <a:rPr lang="en-US" sz="3200" b="1" dirty="0">
+                <a:solidFill>
+                  <a:schemeClr val="tx2"/>
+                </a:solidFill>
+              </a:rPr>
+              <a:t>テーマを選べる</a:t>
+            </a:r>
+            <a:endParaRPr lang="en-US" sz="3200" dirty="0"/>
+          </a:p>
+        </p:txBody>
+      </p:sp>
+      <p:sp>
+        <p:nvSpPr>
+          <p:cNvPr id="3" name="Shape 1"/>
+          <p:cNvSpPr/>
+          <p:nvPr/>
+        </p:nvSpPr>
+        <p:spPr>
+          <a:xfrm>
+            <a:off x="548640" y="1371600"/>
+            <a:ext cx="5364328" cy="2011680"/>
+          </a:xfrm>
+          <a:prstGeom prst="roundRect">
+            <a:avLst>
+              <a:gd name="adj" fmla="val 5455"/>
+            </a:avLst>
+          </a:prstGeom>
+          <a:solidFill>
+            <a:schemeClr val="bg1"/>
+          </a:solidFill>
+          <a:ln w="12700">
+            <a:solidFill>
+              <a:srgbClr val="CBD5E1"/>
+            </a:solidFill>
+            <a:prstDash val="solid"/>
+          </a:ln>
+        </p:spPr>
+      </p:sp>
+      <p:sp>
+        <p:nvSpPr>
+          <p:cNvPr id="4" name="Text 2"/>
+          <p:cNvSpPr txBox="1"/>
+          <p:nvPr/>
+        </p:nvSpPr>
+        <p:spPr>
+          <a:xfrm>
+            <a:off x="822960" y="1554480"/>
+            <a:ext cx="4815688" cy="365760"/>
+          </a:xfrm>
+          <a:prstGeom prst="rect">
+            <a:avLst/>
+          </a:prstGeom>
+          <a:noFill/>
+          <a:ln/>
+        </p:spPr>
+        <p:txBody>
+          <a:bodyPr wrap="square" lIns="0" tIns="0" rIns="0" bIns="0" rtlCol="0" anchor="ctr"/>
+          <a:lstStyle/>
+          <a:p>
+            <a:pPr indent="0" marL="0">
+              <a:buNone/>
+            </a:pPr>
+            <a:r>
+              <a:rPr lang="en-US" sz="1600" b="1" dirty="0">
+                <a:solidFill>
+                  <a:schemeClr val="tx2"/>
+                </a:solidFill>
+              </a:rPr>
+              <a:t>モダン（青）・既定</a:t>
+            </a:r>
+            <a:endParaRPr lang="en-US" sz="1600" dirty="0"/>
+          </a:p>
+        </p:txBody>
+      </p:sp>
+      <p:pic>
+        <p:nvPicPr>
+          <p:cNvPr id="5" name="テーマ見本" descr="テーマ見本: modern">    </p:cNvPr>
+          <p:cNvPicPr>
+            <a:picLocks noChangeAspect="1"/>
+          </p:cNvPicPr>
+          <p:nvPr/>
+        </p:nvPicPr>
+        <p:blipFill>
+          <a:blip r:embed="rId1">
+            <a:extLst>
+              <a:ext uri="{96DAC541-7B7A-43D3-8B79-37D633B846F1}">
+                <asvg:svgBlip xmlns:asvg="http://schemas.microsoft.com/office/drawing/2016/SVG/main" r:embed="rId7"/>
+              </a:ext>
+            </a:extLst>
+          </a:blip>
+          <a:stretch>
+            <a:fillRect/>
+          </a:stretch>
+        </p:blipFill>
+        <p:spPr>
+          <a:xfrm>
+            <a:off x="914400" y="2216033"/>
+            <a:ext cx="4632808" cy="780014"/>
+          </a:xfrm>
+          <a:prstGeom prst="rect">
+            <a:avLst/>
+          </a:prstGeom>
+        </p:spPr>
+      </p:pic>
+      <p:sp>
+        <p:nvSpPr>
+          <p:cNvPr id="6" name="Shape 3"/>
+          <p:cNvSpPr/>
+          <p:nvPr/>
+        </p:nvSpPr>
+        <p:spPr>
+          <a:xfrm>
+            <a:off x="6278728" y="1371600"/>
+            <a:ext cx="5364328" cy="2011680"/>
+          </a:xfrm>
+          <a:prstGeom prst="roundRect">
+            <a:avLst>
+              <a:gd name="adj" fmla="val 5455"/>
+            </a:avLst>
+          </a:prstGeom>
+          <a:solidFill>
+            <a:schemeClr val="bg1"/>
+          </a:solidFill>
+          <a:ln w="12700">
+            <a:solidFill>
+              <a:srgbClr val="CBD5E1"/>
+            </a:solidFill>
+            <a:prstDash val="solid"/>
+          </a:ln>
+        </p:spPr>
+      </p:sp>
+      <p:sp>
+        <p:nvSpPr>
+          <p:cNvPr id="7" name="Text 4"/>
+          <p:cNvSpPr txBox="1"/>
+          <p:nvPr/>
+        </p:nvSpPr>
+        <p:spPr>
+          <a:xfrm>
+            <a:off x="6553048" y="1554480"/>
+            <a:ext cx="4815688" cy="365760"/>
+          </a:xfrm>
+          <a:prstGeom prst="rect">
+            <a:avLst/>
+          </a:prstGeom>
+          <a:noFill/>
+          <a:ln/>
+        </p:spPr>
+        <p:txBody>
+          <a:bodyPr wrap="square" lIns="0" tIns="0" rIns="0" bIns="0" rtlCol="0" anchor="ctr"/>
+          <a:lstStyle/>
+          <a:p>
+            <a:pPr indent="0" marL="0">
+              <a:buNone/>
+            </a:pPr>
+            <a:r>
+              <a:rPr lang="en-US" sz="1600" b="1" dirty="0">
+                <a:solidFill>
+                  <a:schemeClr val="tx2"/>
+                </a:solidFill>
+              </a:rPr>
+              <a:t>モノトーン</a:t>
+            </a:r>
+            <a:endParaRPr lang="en-US" sz="1600" dirty="0"/>
+          </a:p>
+        </p:txBody>
+      </p:sp>
+      <p:pic>
+        <p:nvPicPr>
+          <p:cNvPr id="8" name="テーマ見本" descr="テーマ見本: mono">    </p:cNvPr>
+          <p:cNvPicPr>
+            <a:picLocks noChangeAspect="1"/>
+          </p:cNvPicPr>
+          <p:nvPr/>
+        </p:nvPicPr>
+        <p:blipFill>
+          <a:blip r:embed="rId2">
+            <a:extLst>
+              <a:ext uri="{96DAC541-7B7A-43D3-8B79-37D633B846F1}">
+                <asvg:svgBlip xmlns:asvg="http://schemas.microsoft.com/office/drawing/2016/SVG/main" r:embed="rId8"/>
+              </a:ext>
+            </a:extLst>
+          </a:blip>
+          <a:stretch>
+            <a:fillRect/>
+          </a:stretch>
+        </p:blipFill>
+        <p:spPr>
+          <a:xfrm>
+            <a:off x="6644488" y="2216033"/>
+            <a:ext cx="4632808" cy="780014"/>
+          </a:xfrm>
+          <a:prstGeom prst="rect">
+            <a:avLst/>
+          </a:prstGeom>
+        </p:spPr>
+      </p:pic>
+      <p:sp>
+        <p:nvSpPr>
+          <p:cNvPr id="9" name="Shape 5"/>
+          <p:cNvSpPr/>
+          <p:nvPr/>
+        </p:nvSpPr>
+        <p:spPr>
+          <a:xfrm>
+            <a:off x="548640" y="3703320"/>
+            <a:ext cx="5364328" cy="2011680"/>
+          </a:xfrm>
+          <a:prstGeom prst="roundRect">
+            <a:avLst>
+              <a:gd name="adj" fmla="val 5455"/>
+            </a:avLst>
+          </a:prstGeom>
+          <a:solidFill>
+            <a:schemeClr val="bg1"/>
+          </a:solidFill>
+          <a:ln w="12700">
+            <a:solidFill>
+              <a:srgbClr val="CBD5E1"/>
+            </a:solidFill>
+            <a:prstDash val="solid"/>
+          </a:ln>
+        </p:spPr>
+      </p:sp>
+      <p:sp>
+        <p:nvSpPr>
+          <p:cNvPr id="10" name="Text 6"/>
+          <p:cNvSpPr txBox="1"/>
+          <p:nvPr/>
+        </p:nvSpPr>
+        <p:spPr>
+          <a:xfrm>
+            <a:off x="822960" y="3886200"/>
+            <a:ext cx="4815688" cy="365760"/>
+          </a:xfrm>
+          <a:prstGeom prst="rect">
+            <a:avLst/>
+          </a:prstGeom>
+          <a:noFill/>
+          <a:ln/>
+        </p:spPr>
+        <p:txBody>
+          <a:bodyPr wrap="square" lIns="0" tIns="0" rIns="0" bIns="0" rtlCol="0" anchor="ctr"/>
+          <a:lstStyle/>
+          <a:p>
+            <a:pPr indent="0" marL="0">
+              <a:buNone/>
+            </a:pPr>
+            <a:r>
+              <a:rPr lang="en-US" sz="1600" b="1" dirty="0">
+                <a:solidFill>
+                  <a:schemeClr val="tx2"/>
+                </a:solidFill>
+              </a:rPr>
+              <a:t>ネイビー</a:t>
+            </a:r>
+            <a:endParaRPr lang="en-US" sz="1600" dirty="0"/>
+          </a:p>
+        </p:txBody>
+      </p:sp>
+      <p:pic>
+        <p:nvPicPr>
+          <p:cNvPr id="11" name="テーマ見本" descr="テーマ見本: navy">    </p:cNvPr>
+          <p:cNvPicPr>
+            <a:picLocks noChangeAspect="1"/>
+          </p:cNvPicPr>
+          <p:nvPr/>
+        </p:nvPicPr>
+        <p:blipFill>
+          <a:blip r:embed="rId3">
+            <a:extLst>
+              <a:ext uri="{96DAC541-7B7A-43D3-8B79-37D633B846F1}">
+                <asvg:svgBlip xmlns:asvg="http://schemas.microsoft.com/office/drawing/2016/SVG/main" r:embed="rId9"/>
+              </a:ext>
+            </a:extLst>
+          </a:blip>
+          <a:stretch>
+            <a:fillRect/>
+          </a:stretch>
+        </p:blipFill>
+        <p:spPr>
+          <a:xfrm>
+            <a:off x="914400" y="4547753"/>
+            <a:ext cx="4632808" cy="780014"/>
+          </a:xfrm>
+          <a:prstGeom prst="rect">
+            <a:avLst/>
+          </a:prstGeom>
+        </p:spPr>
+      </p:pic>
+      <p:sp>
+        <p:nvSpPr>
+          <p:cNvPr id="12" name="Shape 7"/>
+          <p:cNvSpPr/>
+          <p:nvPr/>
+        </p:nvSpPr>
+        <p:spPr>
+          <a:xfrm>
+            <a:off x="6278728" y="3703320"/>
+            <a:ext cx="5364328" cy="2011680"/>
+          </a:xfrm>
+          <a:prstGeom prst="roundRect">
+            <a:avLst>
+              <a:gd name="adj" fmla="val 5455"/>
+            </a:avLst>
+          </a:prstGeom>
+          <a:solidFill>
+            <a:schemeClr val="bg1"/>
+          </a:solidFill>
+          <a:ln w="12700">
+            <a:solidFill>
+              <a:srgbClr val="CBD5E1"/>
+            </a:solidFill>
+            <a:prstDash val="solid"/>
+          </a:ln>
+        </p:spPr>
+      </p:sp>
+      <p:sp>
+        <p:nvSpPr>
+          <p:cNvPr id="13" name="Text 8"/>
+          <p:cNvSpPr txBox="1"/>
+          <p:nvPr/>
+        </p:nvSpPr>
+        <p:spPr>
+          <a:xfrm>
+            <a:off x="6553048" y="3886200"/>
+            <a:ext cx="4815688" cy="365760"/>
+          </a:xfrm>
+          <a:prstGeom prst="rect">
+            <a:avLst/>
+          </a:prstGeom>
+          <a:noFill/>
+          <a:ln/>
+        </p:spPr>
+        <p:txBody>
+          <a:bodyPr wrap="square" lIns="0" tIns="0" rIns="0" bIns="0" rtlCol="0" anchor="ctr"/>
+          <a:lstStyle/>
+          <a:p>
+            <a:pPr indent="0" marL="0">
+              <a:buNone/>
+            </a:pPr>
+            <a:r>
+              <a:rPr lang="en-US" sz="1600" b="1" dirty="0">
+                <a:solidFill>
+                  <a:schemeClr val="tx2"/>
+                </a:solidFill>
+              </a:rPr>
+              <a:t>mermaid 標準（default）</a:t>
+            </a:r>
+            <a:endParaRPr lang="en-US" sz="1600" dirty="0"/>
+          </a:p>
+        </p:txBody>
+      </p:sp>
+      <p:pic>
+        <p:nvPicPr>
+          <p:cNvPr id="14" name="テーマ見本" descr="テーマ見本: default">    </p:cNvPr>
+          <p:cNvPicPr>
+            <a:picLocks noChangeAspect="1"/>
+          </p:cNvPicPr>
+          <p:nvPr/>
+        </p:nvPicPr>
+        <p:blipFill>
+          <a:blip r:embed="rId4">
+            <a:extLst>
+              <a:ext uri="{96DAC541-7B7A-43D3-8B79-37D633B846F1}">
+                <asvg:svgBlip xmlns:asvg="http://schemas.microsoft.com/office/drawing/2016/SVG/main" r:embed="rId10"/>
+              </a:ext>
+            </a:extLst>
+          </a:blip>
+          <a:stretch>
+            <a:fillRect/>
+          </a:stretch>
+        </p:blipFill>
+        <p:spPr>
+          <a:xfrm>
+            <a:off x="6644488" y="4547753"/>
+            <a:ext cx="4632808" cy="780014"/>
+          </a:xfrm>
+          <a:prstGeom prst="rect">
+            <a:avLst/>
+          </a:prstGeom>
+        </p:spPr>
+      </p:pic>
+      <p:sp>
+        <p:nvSpPr>
+          <p:cNvPr id="15" name="Text 9"/>
+          <p:cNvSpPr txBox="1"/>
+          <p:nvPr/>
+        </p:nvSpPr>
+        <p:spPr>
+          <a:xfrm>
+            <a:off x="548640" y="5897880"/>
+            <a:ext cx="11094415" cy="365760"/>
+          </a:xfrm>
+          <a:prstGeom prst="rect">
+            <a:avLst/>
+          </a:prstGeom>
+          <a:noFill/>
+          <a:ln/>
+        </p:spPr>
+        <p:txBody>
+          <a:bodyPr wrap="square" lIns="0" tIns="0" rIns="0" bIns="0" rtlCol="0" anchor="ctr"/>
+          <a:lstStyle/>
+          <a:p>
+            <a:pPr indent="0" marL="0">
+              <a:buNone/>
+            </a:pPr>
+            <a:r>
+              <a:rPr lang="en-US" sz="1400" dirty="0">
+                <a:solidFill>
+                  <a:schemeClr val="accent3"/>
+                </a:solidFill>
+              </a:rPr>
+              <a:t>ほかに neutral / dark / forest。テーマはプレゼンごとに保存されます。</a:t>
+            </a:r>
+            <a:endParaRPr lang="en-US" sz="1400" dirty="0"/>
+          </a:p>
+        </p:txBody>
+      </p:sp>
+      <p:sp>
+        <p:nvSpPr>
+          <p:cNvPr id="25" name="Slide Number Placeholder 0"/>
+          <p:cNvSpPr>
+            <a:spLocks noGrp="1"/>
+          </p:cNvSpPr>
+          <p:nvPr>
+            <p:ph type="sldNum" sz="quarter" idx="4294967295"/>
+          </p:nvPr>
+        </p:nvSpPr>
+        <p:spPr>
+          <a:xfrm>
+            <a:off x="11277295" y="6400800"/>
+            <a:ext cx="457200" cy="274320"/>
+          </a:xfrm>
+          <a:prstGeom prst="rect">
+            <a:avLst/>
+          </a:prstGeom>
+          <a:extLst>
+            <a:ext uri="{C572A759-6A51-4108-AA02-DFA0A04FC94B}">
+              <ma14:wrappingTextBoxFlag xmlns:ma14="http://schemas.microsoft.com/office/mac/drawingml/2011/main" val="0"/>
+            </a:ext>
+          </a:extLst>
+        </p:spPr>
+        <p:txBody>
+          <a:bodyPr/>
+          <a:lstStyle>
+            <a:lvl1pPr>
+              <a:defRPr sz="1000">
+                <a:solidFill>
+                  <a:schemeClr val="accent3"/>
+                </a:solidFill>
+              </a:defRPr>
+            </a:lvl1pPr>
+          </a:lstStyle>
+          <a:p>
+            <a:pPr algn="l"/>
+            <a:fld id="{F7021451-1387-4CA6-816F-3879F97B5CBC}" type="slidenum">
+              <a:rPr b="0" lang="en-US"/>
+              <a:t>12</a:t>
+            </a:fld>
+            <a:endParaRPr lang="en-US"/>
+          </a:p>
+        </p:txBody>
+      </p:sp>
+    </p:spTree>
+  </p:cSld>
+  <p:clrMapOvr>
+    <a:masterClrMapping/>
+  </p:clrMapOvr>
+</p:sld>
+</file>
+
+<file path=ppt/slides/slide13.xml><?xml version="1.0" encoding="utf-8"?>
+<p:sld xmlns:a="http://schemas.openxmlformats.org/drawingml/2006/main" xmlns:r="http://schemas.openxmlformats.org/officeDocument/2006/relationships" xmlns:p="http://schemas.openxmlformats.org/presentationml/2006/main">
+  <p:cSld name="Slide 13">
+    <p:spTree>
+      <p:nvGrpSpPr>
+        <p:cNvPr id="1" name=""/>
+        <p:cNvGrpSpPr/>
+        <p:nvPr/>
+      </p:nvGrpSpPr>
+      <p:grpSpPr>
+        <a:xfrm>
+          <a:off x="0" y="0"/>
+          <a:ext cx="0" cy="0"/>
+          <a:chOff x="0" y="0"/>
+          <a:chExt cx="0" cy="0"/>
+        </a:xfrm>
+      </p:grpSpPr>
+      <p:sp>
+        <p:nvSpPr>
+          <p:cNvPr id="2" name="Text 0"/>
+          <p:cNvSpPr/>
+          <p:nvPr>
+            <p:ph idx="100" type="title" hasCustomPrompt="1"/>
+          </p:nvPr>
+        </p:nvSpPr>
+        <p:spPr>
+          <a:xfrm>
+            <a:off x="548640" y="365760"/>
+            <a:ext cx="11094415" cy="822960"/>
+          </a:xfrm>
+          <a:prstGeom prst="rect">
+            <a:avLst/>
+          </a:prstGeom>
+          <a:noFill/>
+          <a:ln/>
+        </p:spPr>
+        <p:txBody>
+          <a:bodyPr wrap="square" lIns="0" tIns="0" rIns="0" bIns="0" rtlCol="0" anchor="ctr"/>
+          <a:lstStyle/>
+          <a:p>
+            <a:pPr indent="0" marL="0">
+              <a:buNone/>
+            </a:pPr>
+            <a:r>
+              <a:rPr lang="en-US" sz="3200" b="1" dirty="0">
+                <a:solidFill>
+                  <a:schemeClr val="tx2"/>
+                </a:solidFill>
+              </a:rPr>
+              <a:t>知っておきたいこと</a:t>
+            </a:r>
+            <a:endParaRPr lang="en-US" sz="3200" dirty="0"/>
+          </a:p>
+        </p:txBody>
+      </p:sp>
+      <p:sp>
+        <p:nvSpPr>
+          <p:cNvPr id="3" name="card"/>
+          <p:cNvSpPr/>
+          <p:nvPr/>
+        </p:nvSpPr>
+        <p:spPr>
+          <a:xfrm>
+            <a:off x="548640" y="1417320"/>
+            <a:ext cx="5364328" cy="2011680"/>
+          </a:xfrm>
+          <a:prstGeom prst="roundRect">
+            <a:avLst>
+              <a:gd name="adj" fmla="val 5455"/>
+            </a:avLst>
+          </a:prstGeom>
+          <a:solidFill>
+            <a:schemeClr val="bg2"/>
+          </a:solidFill>
+          <a:ln/>
+        </p:spPr>
+      </p:sp>
+      <p:sp>
+        <p:nvSpPr>
+          <p:cNvPr id="4" name="Text 2"/>
+          <p:cNvSpPr txBox="1"/>
+          <p:nvPr/>
+        </p:nvSpPr>
+        <p:spPr>
+          <a:xfrm>
+            <a:off x="777240" y="1600200"/>
+            <a:ext cx="4907128" cy="457200"/>
+          </a:xfrm>
+          <a:prstGeom prst="rect">
+            <a:avLst/>
+          </a:prstGeom>
+          <a:noFill/>
+          <a:ln/>
+        </p:spPr>
+        <p:txBody>
+          <a:bodyPr wrap="square" lIns="0" tIns="0" rIns="0" bIns="0" rtlCol="0" anchor="t"/>
+          <a:lstStyle/>
+          <a:p>
+            <a:pPr indent="0" marL="0">
+              <a:buNone/>
+            </a:pPr>
+            <a:r>
+              <a:rPr lang="en-US" sz="1800" b="1" dirty="0">
+                <a:solidFill>
+                  <a:schemeClr val="tx2"/>
+                </a:solidFill>
+              </a:rPr>
+              <a:t>対応環境</a:t>
+            </a:r>
+            <a:endParaRPr lang="en-US" sz="1800" dirty="0"/>
+          </a:p>
+        </p:txBody>
+      </p:sp>
+      <p:sp>
+        <p:nvSpPr>
+          <p:cNvPr id="5" name="Text 3"/>
+          <p:cNvSpPr txBox="1"/>
+          <p:nvPr/>
+        </p:nvSpPr>
+        <p:spPr>
+          <a:xfrm>
+            <a:off x="777240" y="2103120"/>
+            <a:ext cx="4907128" cy="1143000"/>
+          </a:xfrm>
+          <a:prstGeom prst="rect">
+            <a:avLst/>
+          </a:prstGeom>
+          <a:noFill/>
+          <a:ln/>
+        </p:spPr>
+        <p:txBody>
+          <a:bodyPr wrap="square" lIns="0" tIns="0" rIns="0" bIns="0" rtlCol="0" anchor="t"/>
+          <a:lstStyle/>
+          <a:p>
+            <a:pPr indent="0" marL="0">
+              <a:spcAft>
+                <a:spcPts val="400"/>
+              </a:spcAft>
+              <a:buNone/>
+            </a:pPr>
+            <a:r>
+              <a:rPr lang="en-US" sz="1400" dirty="0">
+                <a:solidFill>
+                  <a:schemeClr val="tx1"/>
+                </a:solidFill>
+              </a:rPr>
+              <a:t>Windows 版 PowerPoint（Microsoft 365）で確認しています。Mac・Web 版は未確認です。</a:t>
+            </a:r>
+            <a:endParaRPr lang="en-US" sz="1400" dirty="0"/>
+          </a:p>
+        </p:txBody>
+      </p:sp>
+      <p:sp>
+        <p:nvSpPr>
+          <p:cNvPr id="6" name="card"/>
+          <p:cNvSpPr/>
+          <p:nvPr/>
+        </p:nvSpPr>
+        <p:spPr>
+          <a:xfrm>
+            <a:off x="6278728" y="1417320"/>
+            <a:ext cx="5364328" cy="2011680"/>
+          </a:xfrm>
+          <a:prstGeom prst="roundRect">
+            <a:avLst>
+              <a:gd name="adj" fmla="val 5455"/>
+            </a:avLst>
+          </a:prstGeom>
+          <a:solidFill>
+            <a:schemeClr val="bg2"/>
+          </a:solidFill>
+          <a:ln/>
+        </p:spPr>
+      </p:sp>
+      <p:sp>
+        <p:nvSpPr>
+          <p:cNvPr id="7" name="Text 5"/>
+          <p:cNvSpPr txBox="1"/>
+          <p:nvPr/>
+        </p:nvSpPr>
+        <p:spPr>
+          <a:xfrm>
+            <a:off x="6507328" y="1600200"/>
+            <a:ext cx="4907128" cy="457200"/>
+          </a:xfrm>
+          <a:prstGeom prst="rect">
+            <a:avLst/>
+          </a:prstGeom>
+          <a:noFill/>
+          <a:ln/>
+        </p:spPr>
+        <p:txBody>
+          <a:bodyPr wrap="square" lIns="0" tIns="0" rIns="0" bIns="0" rtlCol="0" anchor="t"/>
+          <a:lstStyle/>
+          <a:p>
+            <a:pPr indent="0" marL="0">
+              <a:buNone/>
+            </a:pPr>
+            <a:r>
+              <a:rPr lang="en-US" sz="1800" b="1" dirty="0">
+                <a:solidFill>
+                  <a:schemeClr val="tx2"/>
+                </a:solidFill>
+              </a:rPr>
+              <a:t>図は画像</a:t>
+            </a:r>
+            <a:endParaRPr lang="en-US" sz="1800" dirty="0"/>
+          </a:p>
+        </p:txBody>
+      </p:sp>
+      <p:sp>
+        <p:nvSpPr>
+          <p:cNvPr id="8" name="Text 6"/>
+          <p:cNvSpPr txBox="1"/>
+          <p:nvPr/>
+        </p:nvSpPr>
+        <p:spPr>
+          <a:xfrm>
+            <a:off x="6507328" y="2103120"/>
+            <a:ext cx="4907128" cy="1143000"/>
+          </a:xfrm>
+          <a:prstGeom prst="rect">
+            <a:avLst/>
+          </a:prstGeom>
+          <a:noFill/>
+          <a:ln/>
+        </p:spPr>
+        <p:txBody>
+          <a:bodyPr wrap="square" lIns="0" tIns="0" rIns="0" bIns="0" rtlCol="0" anchor="t"/>
+          <a:lstStyle/>
+          <a:p>
+            <a:pPr indent="0" marL="0">
+              <a:spcAft>
+                <a:spcPts val="400"/>
+              </a:spcAft>
+              <a:buNone/>
+            </a:pPr>
+            <a:r>
+              <a:rPr lang="en-US" sz="1400" dirty="0">
+                <a:solidFill>
+                  <a:schemeClr val="tx1"/>
+                </a:solidFill>
+              </a:rPr>
+              <a:t>PowerPoint の図形として部分的に編集はできません。直すときはノートを直します。</a:t>
+            </a:r>
+            <a:endParaRPr lang="en-US" sz="1400" dirty="0"/>
+          </a:p>
+        </p:txBody>
+      </p:sp>
+      <p:sp>
+        <p:nvSpPr>
+          <p:cNvPr id="9" name="card"/>
+          <p:cNvSpPr/>
+          <p:nvPr/>
+        </p:nvSpPr>
+        <p:spPr>
+          <a:xfrm>
+            <a:off x="548640" y="3703320"/>
+            <a:ext cx="5364328" cy="2011680"/>
+          </a:xfrm>
+          <a:prstGeom prst="roundRect">
+            <a:avLst>
+              <a:gd name="adj" fmla="val 5455"/>
+            </a:avLst>
+          </a:prstGeom>
+          <a:solidFill>
+            <a:schemeClr val="bg2"/>
+          </a:solidFill>
+          <a:ln/>
+        </p:spPr>
+      </p:sp>
+      <p:sp>
+        <p:nvSpPr>
+          <p:cNvPr id="10" name="Text 8"/>
+          <p:cNvSpPr txBox="1"/>
+          <p:nvPr/>
+        </p:nvSpPr>
+        <p:spPr>
+          <a:xfrm>
+            <a:off x="777240" y="3886200"/>
+            <a:ext cx="4907128" cy="457200"/>
+          </a:xfrm>
+          <a:prstGeom prst="rect">
+            <a:avLst/>
+          </a:prstGeom>
+          <a:noFill/>
+          <a:ln/>
+        </p:spPr>
+        <p:txBody>
+          <a:bodyPr wrap="square" lIns="0" tIns="0" rIns="0" bIns="0" rtlCol="0" anchor="t"/>
+          <a:lstStyle/>
+          <a:p>
+            <a:pPr indent="0" marL="0">
+              <a:buNone/>
+            </a:pPr>
+            <a:r>
+              <a:rPr lang="en-US" sz="1800" b="1" dirty="0">
+                <a:solidFill>
+                  <a:schemeClr val="tx2"/>
+                </a:solidFill>
+              </a:rPr>
+              <a:t>余白はクリックできない</a:t>
+            </a:r>
+            <a:endParaRPr lang="en-US" sz="1800" dirty="0"/>
+          </a:p>
+        </p:txBody>
+      </p:sp>
+      <p:sp>
+        <p:nvSpPr>
+          <p:cNvPr id="11" name="Text 9"/>
+          <p:cNvSpPr txBox="1"/>
+          <p:nvPr/>
+        </p:nvSpPr>
+        <p:spPr>
+          <a:xfrm>
+            <a:off x="777240" y="4389120"/>
+            <a:ext cx="4907128" cy="1143000"/>
+          </a:xfrm>
+          <a:prstGeom prst="rect">
+            <a:avLst/>
+          </a:prstGeom>
+          <a:noFill/>
+          <a:ln/>
+        </p:spPr>
+        <p:txBody>
+          <a:bodyPr wrap="square" lIns="0" tIns="0" rIns="0" bIns="0" rtlCol="0" anchor="t"/>
+          <a:lstStyle/>
+          <a:p>
+            <a:pPr indent="0" marL="0">
+              <a:spcAft>
+                <a:spcPts val="400"/>
+              </a:spcAft>
+              <a:buNone/>
+            </a:pPr>
+            <a:r>
+              <a:rPr lang="en-US" sz="1400" dirty="0">
+                <a:solidFill>
+                  <a:schemeClr val="tx1"/>
+                </a:solidFill>
+              </a:rPr>
+              <a:t>図を選ぶときは、線や文字の部分をクリックしてください。</a:t>
+            </a:r>
+            <a:endParaRPr lang="en-US" sz="1400" dirty="0"/>
+          </a:p>
+        </p:txBody>
+      </p:sp>
+      <p:sp>
+        <p:nvSpPr>
+          <p:cNvPr id="12" name="card"/>
+          <p:cNvSpPr/>
+          <p:nvPr/>
+        </p:nvSpPr>
+        <p:spPr>
+          <a:xfrm>
+            <a:off x="6278728" y="3703320"/>
+            <a:ext cx="5364328" cy="2011680"/>
+          </a:xfrm>
+          <a:prstGeom prst="roundRect">
+            <a:avLst>
+              <a:gd name="adj" fmla="val 5455"/>
+            </a:avLst>
+          </a:prstGeom>
+          <a:solidFill>
+            <a:schemeClr val="bg2"/>
+          </a:solidFill>
+          <a:ln/>
+        </p:spPr>
+      </p:sp>
+      <p:sp>
+        <p:nvSpPr>
+          <p:cNvPr id="13" name="Text 11"/>
+          <p:cNvSpPr txBox="1"/>
+          <p:nvPr/>
+        </p:nvSpPr>
+        <p:spPr>
+          <a:xfrm>
+            <a:off x="6507328" y="3886200"/>
+            <a:ext cx="4907128" cy="457200"/>
+          </a:xfrm>
+          <a:prstGeom prst="rect">
+            <a:avLst/>
+          </a:prstGeom>
+          <a:noFill/>
+          <a:ln/>
+        </p:spPr>
+        <p:txBody>
+          <a:bodyPr wrap="square" lIns="0" tIns="0" rIns="0" bIns="0" rtlCol="0" anchor="t"/>
+          <a:lstStyle/>
+          <a:p>
+            <a:pPr indent="0" marL="0">
+              <a:buNone/>
+            </a:pPr>
+            <a:r>
+              <a:rPr lang="en-US" sz="1800" b="1" dirty="0">
+                <a:solidFill>
+                  <a:schemeClr val="tx2"/>
+                </a:solidFill>
+              </a:rPr>
+              <a:t>「アドイン エラー」と出たら</a:t>
+            </a:r>
+            <a:endParaRPr lang="en-US" sz="1800" dirty="0"/>
+          </a:p>
+        </p:txBody>
+      </p:sp>
+      <p:sp>
+        <p:nvSpPr>
+          <p:cNvPr id="14" name="Text 12"/>
+          <p:cNvSpPr txBox="1"/>
+          <p:nvPr/>
+        </p:nvSpPr>
+        <p:spPr>
+          <a:xfrm>
+            <a:off x="6507328" y="4389120"/>
+            <a:ext cx="4907128" cy="1143000"/>
+          </a:xfrm>
+          <a:prstGeom prst="rect">
+            <a:avLst/>
+          </a:prstGeom>
+          <a:noFill/>
+          <a:ln/>
+        </p:spPr>
+        <p:txBody>
+          <a:bodyPr wrap="square" lIns="0" tIns="0" rIns="0" bIns="0" rtlCol="0" anchor="t"/>
+          <a:lstStyle/>
+          <a:p>
+            <a:pPr indent="0" marL="0">
+              <a:spcAft>
+                <a:spcPts val="400"/>
+              </a:spcAft>
+              <a:buNone/>
+            </a:pPr>
+            <a:r>
+              <a:rPr lang="en-US" sz="1400" dirty="0">
+                <a:solidFill>
+                  <a:schemeClr val="tx1"/>
+                </a:solidFill>
+              </a:rPr>
+              <a:t>アドインを読み込めなかったときの表示です。図とノートはそのまま残っています。</a:t>
+            </a:r>
+            <a:endParaRPr lang="en-US" sz="1400" dirty="0"/>
+          </a:p>
+        </p:txBody>
+      </p:sp>
+      <p:sp>
+        <p:nvSpPr>
+          <p:cNvPr id="25" name="Slide Number Placeholder 0"/>
+          <p:cNvSpPr>
+            <a:spLocks noGrp="1"/>
+          </p:cNvSpPr>
+          <p:nvPr>
+            <p:ph type="sldNum" sz="quarter" idx="4294967295"/>
+          </p:nvPr>
+        </p:nvSpPr>
+        <p:spPr>
+          <a:xfrm>
+            <a:off x="11277295" y="6400800"/>
+            <a:ext cx="457200" cy="274320"/>
+          </a:xfrm>
+          <a:prstGeom prst="rect">
+            <a:avLst/>
+          </a:prstGeom>
+          <a:extLst>
+            <a:ext uri="{C572A759-6A51-4108-AA02-DFA0A04FC94B}">
+              <ma14:wrappingTextBoxFlag xmlns:ma14="http://schemas.microsoft.com/office/mac/drawingml/2011/main" val="0"/>
+            </a:ext>
+          </a:extLst>
+        </p:spPr>
+        <p:txBody>
+          <a:bodyPr/>
+          <a:lstStyle>
+            <a:lvl1pPr>
+              <a:defRPr sz="1000">
+                <a:solidFill>
+                  <a:schemeClr val="accent3"/>
+                </a:solidFill>
+              </a:defRPr>
+            </a:lvl1pPr>
+          </a:lstStyle>
+          <a:p>
+            <a:pPr algn="l"/>
+            <a:fld id="{F7021451-1387-4CA6-816F-3879F97B5CBC}" type="slidenum">
+              <a:rPr b="0" lang="en-US"/>
+              <a:t>13</a:t>
+            </a:fld>
+            <a:endParaRPr lang="en-US"/>
+          </a:p>
+        </p:txBody>
+      </p:sp>
+    </p:spTree>
+  </p:cSld>
+  <p:clrMapOvr>
+    <a:masterClrMapping/>
+  </p:clrMapOvr>
+</p:sld>
+</file>
+
+<file path=ppt/slides/slide14.xml><?xml version="1.0" encoding="utf-8"?>
+<p:sld xmlns:a="http://schemas.openxmlformats.org/drawingml/2006/main" xmlns:r="http://schemas.openxmlformats.org/officeDocument/2006/relationships" xmlns:p="http://schemas.openxmlformats.org/presentationml/2006/main">
+  <p:cSld name="Slide 14">
+    <p:spTree>
+      <p:nvGrpSpPr>
+        <p:cNvPr id="1" name=""/>
+        <p:cNvGrpSpPr/>
+        <p:nvPr/>
+      </p:nvGrpSpPr>
+      <p:grpSpPr>
+        <a:xfrm>
+          <a:off x="0" y="0"/>
+          <a:ext cx="0" cy="0"/>
+          <a:chOff x="0" y="0"/>
+          <a:chExt cx="0" cy="0"/>
+        </a:xfrm>
+      </p:grpSpPr>
+      <p:sp>
+        <p:nvSpPr>
+          <p:cNvPr id="2" name="Text 0"/>
           <p:cNvSpPr txBox="1"/>
           <p:nvPr/>
         </p:nvSpPr>
@@ -2286,7 +4095,7 @@
                   <a:schemeClr val="accent4"/>
                 </a:solidFill>
               </a:rPr>
-              <a:t>2・3・7枚目のノートを開いてみてください。アドインを入れて、ノートを直して「図を生成」を押すと図が変わります。</a:t>
+              <a:t>2・3・9枚目のノートを開いてみてください。アドインを入れて、ノートを直して「図を生成」を押すと図が変わります。</a:t>
             </a:r>
             <a:endParaRPr lang="en-US" sz="1800" dirty="0"/>
           </a:p>
@@ -2454,7 +4263,7 @@
             <a:pPr algn="l"/>
             <a:fld id="{F7021451-1387-4CA6-816F-3879F97B5CBC}" type="slidenum">
               <a:rPr b="0" lang="en-US"/>
-              <a:t>10</a:t>
+              <a:t>14</a:t>
             </a:fld>
             <a:endParaRPr lang="en-US"/>
           </a:p>
@@ -3893,44 +5702,160 @@
                   <a:schemeClr val="tx2"/>
                 </a:solidFill>
               </a:rPr>
-              <a:t>ノートの書き方</a:t>
+              <a:t>使ってみる</a:t>
             </a:r>
             <a:endParaRPr lang="en-US" sz="3200" dirty="0"/>
           </a:p>
         </p:txBody>
       </p:sp>
-      <p:sp>
-        <p:nvSpPr>
-          <p:cNvPr id="3" name="Shape 1"/>
+      <p:pic>
+        <p:nvPicPr>
+          <p:cNvPr id="3" name="Image 0" descr="画面: A-hero">    </p:cNvPr>
+          <p:cNvPicPr>
+            <a:picLocks noChangeAspect="1"/>
+          </p:cNvPicPr>
+          <p:nvPr/>
+        </p:nvPicPr>
+        <p:blipFill>
+          <a:blip r:embed="rId1"/>
+          <a:stretch>
+            <a:fillRect/>
+          </a:stretch>
+        </p:blipFill>
+        <p:spPr>
+          <a:xfrm>
+            <a:off x="548640" y="1412824"/>
+            <a:ext cx="7863840" cy="4672432"/>
+          </a:xfrm>
+          <a:prstGeom prst="rect">
+            <a:avLst/>
+          </a:prstGeom>
+        </p:spPr>
+      </p:pic>
+      <p:sp>
+        <p:nvSpPr>
+          <p:cNvPr id="4" name="Shape 1"/>
           <p:cNvSpPr/>
           <p:nvPr/>
         </p:nvSpPr>
         <p:spPr>
           <a:xfrm>
-            <a:off x="548640" y="1417320"/>
-            <a:ext cx="5669280" cy="3566160"/>
-          </a:xfrm>
-          <a:prstGeom prst="roundRect">
-            <a:avLst>
-              <a:gd name="adj" fmla="val 3077"/>
-            </a:avLst>
+            <a:off x="548640" y="1412824"/>
+            <a:ext cx="7863840" cy="4672432"/>
+          </a:xfrm>
+          <a:prstGeom prst="rect">
+            <a:avLst/>
+          </a:prstGeom>
+          <a:ln w="9525">
+            <a:solidFill>
+              <a:srgbClr val="CBD5E1"/>
+            </a:solidFill>
+            <a:prstDash val="solid"/>
+          </a:ln>
+        </p:spPr>
+      </p:sp>
+      <p:sp>
+        <p:nvSpPr>
+          <p:cNvPr id="5" name="Shape 2"/>
+          <p:cNvSpPr/>
+          <p:nvPr/>
+        </p:nvSpPr>
+        <p:spPr>
+          <a:xfrm>
+            <a:off x="8732520" y="1463040"/>
+            <a:ext cx="502920" cy="502920"/>
+          </a:xfrm>
+          <a:prstGeom prst="ellipse">
+            <a:avLst/>
           </a:prstGeom>
           <a:solidFill>
-            <a:schemeClr val="tx2"/>
+            <a:schemeClr val="accent1"/>
           </a:solidFill>
           <a:ln/>
         </p:spPr>
       </p:sp>
       <p:sp>
         <p:nvSpPr>
-          <p:cNvPr id="4" name="Text 2"/>
+          <p:cNvPr id="6" name="Text 3"/>
           <p:cNvSpPr txBox="1"/>
           <p:nvPr/>
         </p:nvSpPr>
         <p:spPr>
           <a:xfrm>
-            <a:off x="868680" y="1691640"/>
-            <a:ext cx="5029200" cy="3017520"/>
+            <a:off x="8732520" y="1463040"/>
+            <a:ext cx="502920" cy="502920"/>
+          </a:xfrm>
+          <a:prstGeom prst="rect">
+            <a:avLst/>
+          </a:prstGeom>
+          <a:noFill/>
+          <a:ln/>
+        </p:spPr>
+        <p:txBody>
+          <a:bodyPr wrap="square" lIns="0" tIns="0" rIns="0" bIns="0" rtlCol="0" anchor="ctr"/>
+          <a:lstStyle/>
+          <a:p>
+            <a:pPr algn="ctr" indent="0" marL="0">
+              <a:buNone/>
+            </a:pPr>
+            <a:r>
+              <a:rPr lang="en-US" sz="1800" b="1" dirty="0">
+                <a:solidFill>
+                  <a:schemeClr val="bg1"/>
+                </a:solidFill>
+              </a:rPr>
+              <a:t>1</a:t>
+            </a:r>
+            <a:endParaRPr lang="en-US" sz="1800" dirty="0"/>
+          </a:p>
+        </p:txBody>
+      </p:sp>
+      <p:sp>
+        <p:nvSpPr>
+          <p:cNvPr id="7" name="Text 4"/>
+          <p:cNvSpPr txBox="1"/>
+          <p:nvPr/>
+        </p:nvSpPr>
+        <p:spPr>
+          <a:xfrm>
+            <a:off x="9372600" y="1463040"/>
+            <a:ext cx="2270455" cy="457200"/>
+          </a:xfrm>
+          <a:prstGeom prst="rect">
+            <a:avLst/>
+          </a:prstGeom>
+          <a:noFill/>
+          <a:ln/>
+        </p:spPr>
+        <p:txBody>
+          <a:bodyPr wrap="square" lIns="0" tIns="0" rIns="0" bIns="0" rtlCol="0" anchor="ctr"/>
+          <a:lstStyle/>
+          <a:p>
+            <a:pPr indent="0" marL="0">
+              <a:buNone/>
+            </a:pPr>
+            <a:r>
+              <a:rPr lang="en-US" sz="1700" b="1" dirty="0">
+                <a:solidFill>
+                  <a:schemeClr val="tx2"/>
+                </a:solidFill>
+              </a:rPr>
+              <a:t>ノートに貼る</a:t>
+            </a:r>
+            <a:endParaRPr lang="en-US" sz="1700" dirty="0"/>
+          </a:p>
+        </p:txBody>
+      </p:sp>
+      <p:sp>
+        <p:nvSpPr>
+          <p:cNvPr id="8" name="Text 5"/>
+          <p:cNvSpPr txBox="1"/>
+          <p:nvPr/>
+        </p:nvSpPr>
+        <p:spPr>
+          <a:xfrm>
+            <a:off x="8732520" y="2057400"/>
+            <a:ext cx="2910535" cy="822960"/>
           </a:xfrm>
           <a:prstGeom prst="rect">
             <a:avLst/>
@@ -3946,121 +5871,211 @@
               <a:buNone/>
             </a:pPr>
             <a:r>
-              <a:rPr lang="en-US" sz="1800" dirty="0">
+              <a:rPr lang="en-US" sz="1300" dirty="0">
+                <a:solidFill>
+                  <a:schemeClr val="tx1"/>
+                </a:solidFill>
+              </a:rPr>
+              <a:t>LLM などで書いた Mermaid を、```mermaid で囲んでノートに貼ります。</a:t>
+            </a:r>
+            <a:endParaRPr lang="en-US" sz="1300" dirty="0"/>
+          </a:p>
+        </p:txBody>
+      </p:sp>
+      <p:sp>
+        <p:nvSpPr>
+          <p:cNvPr id="9" name="Shape 6"/>
+          <p:cNvSpPr/>
+          <p:nvPr/>
+        </p:nvSpPr>
+        <p:spPr>
+          <a:xfrm>
+            <a:off x="8732520" y="3017520"/>
+            <a:ext cx="502920" cy="502920"/>
+          </a:xfrm>
+          <a:prstGeom prst="ellipse">
+            <a:avLst/>
+          </a:prstGeom>
+          <a:solidFill>
+            <a:schemeClr val="accent1"/>
+          </a:solidFill>
+          <a:ln/>
+        </p:spPr>
+      </p:sp>
+      <p:sp>
+        <p:nvSpPr>
+          <p:cNvPr id="10" name="Text 7"/>
+          <p:cNvSpPr txBox="1"/>
+          <p:nvPr/>
+        </p:nvSpPr>
+        <p:spPr>
+          <a:xfrm>
+            <a:off x="8732520" y="3017520"/>
+            <a:ext cx="502920" cy="502920"/>
+          </a:xfrm>
+          <a:prstGeom prst="rect">
+            <a:avLst/>
+          </a:prstGeom>
+          <a:noFill/>
+          <a:ln/>
+        </p:spPr>
+        <p:txBody>
+          <a:bodyPr wrap="square" lIns="0" tIns="0" rIns="0" bIns="0" rtlCol="0" anchor="ctr"/>
+          <a:lstStyle/>
+          <a:p>
+            <a:pPr algn="ctr" indent="0" marL="0">
+              <a:buNone/>
+            </a:pPr>
+            <a:r>
+              <a:rPr lang="en-US" sz="1800" b="1" dirty="0">
                 <a:solidFill>
                   <a:schemeClr val="bg1"/>
                 </a:solidFill>
-                <a:latin typeface="Courier New" pitchFamily="34" charset="0"/>
-                <a:ea typeface="Courier New" pitchFamily="34" charset="-122"/>
-                <a:cs typeface="Courier New" pitchFamily="34" charset="-120"/>
-              </a:rPr>
-              <a:t>発表者メモは自由に書けます。</a:t>
+              </a:rPr>
+              <a:t>2</a:t>
             </a:r>
             <a:endParaRPr lang="en-US" sz="1800" dirty="0"/>
           </a:p>
-          <a:p>
-            <a:pPr indent="0" marL="0">
-              <a:buNone/>
-            </a:pPr>
+        </p:txBody>
+      </p:sp>
+      <p:sp>
+        <p:nvSpPr>
+          <p:cNvPr id="11" name="Text 8"/>
+          <p:cNvSpPr txBox="1"/>
+          <p:nvPr/>
+        </p:nvSpPr>
+        <p:spPr>
+          <a:xfrm>
+            <a:off x="9372600" y="3017520"/>
+            <a:ext cx="2270455" cy="457200"/>
+          </a:xfrm>
+          <a:prstGeom prst="rect">
+            <a:avLst/>
+          </a:prstGeom>
+          <a:noFill/>
+          <a:ln/>
+        </p:spPr>
+        <p:txBody>
+          <a:bodyPr wrap="square" lIns="0" tIns="0" rIns="0" bIns="0" rtlCol="0" anchor="ctr"/>
+          <a:lstStyle/>
+          <a:p>
+            <a:pPr indent="0" marL="0">
+              <a:buNone/>
+            </a:pPr>
+            <a:r>
+              <a:rPr lang="en-US" sz="1700" b="1" dirty="0">
+                <a:solidFill>
+                  <a:schemeClr val="tx2"/>
+                </a:solidFill>
+              </a:rPr>
+              <a:t>「図を生成」を押す</a:t>
+            </a:r>
+            <a:endParaRPr lang="en-US" sz="1700" dirty="0"/>
+          </a:p>
+        </p:txBody>
+      </p:sp>
+      <p:sp>
+        <p:nvSpPr>
+          <p:cNvPr id="12" name="Text 9"/>
+          <p:cNvSpPr txBox="1"/>
+          <p:nvPr/>
+        </p:nvSpPr>
+        <p:spPr>
+          <a:xfrm>
+            <a:off x="8732520" y="3611880"/>
+            <a:ext cx="2910535" cy="822960"/>
+          </a:xfrm>
+          <a:prstGeom prst="rect">
+            <a:avLst/>
+          </a:prstGeom>
+          <a:noFill/>
+          <a:ln/>
+        </p:spPr>
+        <p:txBody>
+          <a:bodyPr wrap="square" lIns="0" tIns="0" rIns="0" bIns="0" rtlCol="0" anchor="t"/>
+          <a:lstStyle/>
+          <a:p>
+            <a:pPr indent="0" marL="0">
+              <a:buNone/>
+            </a:pPr>
+            <a:r>
+              <a:rPr lang="en-US" sz="1300" dirty="0">
+                <a:solidFill>
+                  <a:schemeClr val="tx1"/>
+                </a:solidFill>
+              </a:rPr>
+              <a:t>ホームタブの Mermaid グループにあります。</a:t>
+            </a:r>
+            <a:endParaRPr lang="en-US" sz="1300" dirty="0"/>
+          </a:p>
+        </p:txBody>
+      </p:sp>
+      <p:sp>
+        <p:nvSpPr>
+          <p:cNvPr id="13" name="Shape 10"/>
+          <p:cNvSpPr/>
+          <p:nvPr/>
+        </p:nvSpPr>
+        <p:spPr>
+          <a:xfrm>
+            <a:off x="8732520" y="4572000"/>
+            <a:ext cx="502920" cy="502920"/>
+          </a:xfrm>
+          <a:prstGeom prst="ellipse">
+            <a:avLst/>
+          </a:prstGeom>
+          <a:solidFill>
+            <a:schemeClr val="accent1"/>
+          </a:solidFill>
+          <a:ln/>
+        </p:spPr>
+      </p:sp>
+      <p:sp>
+        <p:nvSpPr>
+          <p:cNvPr id="14" name="Text 11"/>
+          <p:cNvSpPr txBox="1"/>
+          <p:nvPr/>
+        </p:nvSpPr>
+        <p:spPr>
+          <a:xfrm>
+            <a:off x="8732520" y="4572000"/>
+            <a:ext cx="502920" cy="502920"/>
+          </a:xfrm>
+          <a:prstGeom prst="rect">
+            <a:avLst/>
+          </a:prstGeom>
+          <a:noFill/>
+          <a:ln/>
+        </p:spPr>
+        <p:txBody>
+          <a:bodyPr wrap="square" lIns="0" tIns="0" rIns="0" bIns="0" rtlCol="0" anchor="ctr"/>
+          <a:lstStyle/>
+          <a:p>
+            <a:pPr algn="ctr" indent="0" marL="0">
+              <a:buNone/>
+            </a:pPr>
+            <a:r>
+              <a:rPr lang="en-US" sz="1800" b="1" dirty="0">
+                <a:solidFill>
+                  <a:schemeClr val="bg1"/>
+                </a:solidFill>
+              </a:rPr>
+              <a:t>3</a:t>
+            </a:r>
             <a:endParaRPr lang="en-US" sz="1800" dirty="0"/>
           </a:p>
-          <a:p>
-            <a:pPr indent="0" marL="0">
-              <a:buNone/>
-            </a:pPr>
-            <a:r>
-              <a:rPr lang="en-US" sz="1800" dirty="0">
-                <a:solidFill>
-                  <a:schemeClr val="bg1"/>
-                </a:solidFill>
-                <a:latin typeface="Courier New" pitchFamily="34" charset="0"/>
-                <a:ea typeface="Courier New" pitchFamily="34" charset="-122"/>
-                <a:cs typeface="Courier New" pitchFamily="34" charset="-120"/>
-              </a:rPr>
-              <a:t>```mermaid id=login</a:t>
-            </a:r>
-            <a:endParaRPr lang="en-US" sz="1800" dirty="0"/>
-          </a:p>
-          <a:p>
-            <a:pPr indent="0" marL="0">
-              <a:buNone/>
-            </a:pPr>
-            <a:r>
-              <a:rPr lang="en-US" sz="1800" dirty="0">
-                <a:solidFill>
-                  <a:schemeClr val="bg1"/>
-                </a:solidFill>
-                <a:latin typeface="Courier New" pitchFamily="34" charset="0"/>
-                <a:ea typeface="Courier New" pitchFamily="34" charset="-122"/>
-                <a:cs typeface="Courier New" pitchFamily="34" charset="-120"/>
-              </a:rPr>
-              <a:t>sequenceDiagram</a:t>
-            </a:r>
-            <a:endParaRPr lang="en-US" sz="1800" dirty="0"/>
-          </a:p>
-          <a:p>
-            <a:pPr indent="0" marL="0">
-              <a:buNone/>
-            </a:pPr>
-            <a:r>
-              <a:rPr lang="en-US" sz="1800" dirty="0">
-                <a:solidFill>
-                  <a:schemeClr val="bg1"/>
-                </a:solidFill>
-                <a:latin typeface="Courier New" pitchFamily="34" charset="0"/>
-                <a:ea typeface="Courier New" pitchFamily="34" charset="-122"/>
-                <a:cs typeface="Courier New" pitchFamily="34" charset="-120"/>
-              </a:rPr>
-              <a:t>  User-&gt;&gt;App: ログイン</a:t>
-            </a:r>
-            <a:endParaRPr lang="en-US" sz="1800" dirty="0"/>
-          </a:p>
-          <a:p>
-            <a:pPr indent="0" marL="0">
-              <a:buNone/>
-            </a:pPr>
-            <a:r>
-              <a:rPr lang="en-US" sz="1800" dirty="0">
-                <a:solidFill>
-                  <a:schemeClr val="bg1"/>
-                </a:solidFill>
-                <a:latin typeface="Courier New" pitchFamily="34" charset="0"/>
-                <a:ea typeface="Courier New" pitchFamily="34" charset="-122"/>
-                <a:cs typeface="Courier New" pitchFamily="34" charset="-120"/>
-              </a:rPr>
-              <a:t>  App--&gt;&gt;User: OK</a:t>
-            </a:r>
-            <a:endParaRPr lang="en-US" sz="1800" dirty="0"/>
-          </a:p>
-          <a:p>
-            <a:pPr indent="0" marL="0">
-              <a:buNone/>
-            </a:pPr>
-            <a:r>
-              <a:rPr lang="en-US" sz="1800" dirty="0">
-                <a:solidFill>
-                  <a:schemeClr val="bg1"/>
-                </a:solidFill>
-                <a:latin typeface="Courier New" pitchFamily="34" charset="0"/>
-                <a:ea typeface="Courier New" pitchFamily="34" charset="-122"/>
-                <a:cs typeface="Courier New" pitchFamily="34" charset="-120"/>
-              </a:rPr>
-              <a:t>```</a:t>
-            </a:r>
-            <a:endParaRPr lang="en-US" sz="1800" dirty="0"/>
-          </a:p>
-        </p:txBody>
-      </p:sp>
-      <p:sp>
-        <p:nvSpPr>
-          <p:cNvPr id="5" name="Text 3"/>
+        </p:txBody>
+      </p:sp>
+      <p:sp>
+        <p:nvSpPr>
+          <p:cNvPr id="15" name="Text 12"/>
           <p:cNvSpPr txBox="1"/>
           <p:nvPr/>
         </p:nvSpPr>
         <p:spPr>
           <a:xfrm>
-            <a:off x="6675120" y="1417320"/>
-            <a:ext cx="4967935" cy="411480"/>
+            <a:off x="9372600" y="4572000"/>
+            <a:ext cx="2270455" cy="457200"/>
           </a:xfrm>
           <a:prstGeom prst="rect">
             <a:avLst/>
@@ -4076,27 +6091,27 @@
               <a:buNone/>
             </a:pPr>
             <a:r>
-              <a:rPr lang="en-US" sz="1800" b="1" dirty="0">
-                <a:solidFill>
-                  <a:schemeClr val="accent1"/>
-                </a:solidFill>
-              </a:rPr>
-              <a:t>id= で図に名前を付ける</a:t>
-            </a:r>
-            <a:endParaRPr lang="en-US" sz="1800" dirty="0"/>
-          </a:p>
-        </p:txBody>
-      </p:sp>
-      <p:sp>
-        <p:nvSpPr>
-          <p:cNvPr id="6" name="Text 4"/>
+              <a:rPr lang="en-US" sz="1700" b="1" dirty="0">
+                <a:solidFill>
+                  <a:schemeClr val="tx2"/>
+                </a:solidFill>
+              </a:rPr>
+              <a:t>スライドに図が入る</a:t>
+            </a:r>
+            <a:endParaRPr lang="en-US" sz="1700" dirty="0"/>
+          </a:p>
+        </p:txBody>
+      </p:sp>
+      <p:sp>
+        <p:nvSpPr>
+          <p:cNvPr id="16" name="Text 13"/>
           <p:cNvSpPr txBox="1"/>
           <p:nvPr/>
         </p:nvSpPr>
         <p:spPr>
           <a:xfrm>
-            <a:off x="6675120" y="1828800"/>
-            <a:ext cx="4967935" cy="594360"/>
+            <a:off x="8732520" y="5166360"/>
+            <a:ext cx="2910535" cy="822960"/>
           </a:xfrm>
           <a:prstGeom prst="rect">
             <a:avLst/>
@@ -4112,230 +6127,14 @@
               <a:buNone/>
             </a:pPr>
             <a:r>
-              <a:rPr lang="en-US" sz="1400" dirty="0">
+              <a:rPr lang="en-US" sz="1300" dirty="0">
                 <a:solidFill>
                   <a:schemeClr val="tx1"/>
                 </a:solidFill>
               </a:rPr>
-              <a:t>省略すると出現順に 1, 2, …。並べ替えるなら付けておくと安心です。</a:t>
-            </a:r>
-            <a:endParaRPr lang="en-US" sz="1400" dirty="0"/>
-          </a:p>
-        </p:txBody>
-      </p:sp>
-      <p:sp>
-        <p:nvSpPr>
-          <p:cNvPr id="7" name="Text 5"/>
-          <p:cNvSpPr txBox="1"/>
-          <p:nvPr/>
-        </p:nvSpPr>
-        <p:spPr>
-          <a:xfrm>
-            <a:off x="6675120" y="2560320"/>
-            <a:ext cx="4967935" cy="411480"/>
-          </a:xfrm>
-          <a:prstGeom prst="rect">
-            <a:avLst/>
-          </a:prstGeom>
-          <a:noFill/>
-          <a:ln/>
-        </p:spPr>
-        <p:txBody>
-          <a:bodyPr wrap="square" lIns="0" tIns="0" rIns="0" bIns="0" rtlCol="0" anchor="ctr"/>
-          <a:lstStyle/>
-          <a:p>
-            <a:pPr indent="0" marL="0">
-              <a:buNone/>
-            </a:pPr>
-            <a:r>
-              <a:rPr lang="en-US" sz="1800" b="1" dirty="0">
-                <a:solidFill>
-                  <a:schemeClr val="accent1"/>
-                </a:solidFill>
-              </a:rPr>
-              <a:t>1つのノートに何個でも</a:t>
-            </a:r>
-            <a:endParaRPr lang="en-US" sz="1800" dirty="0"/>
-          </a:p>
-        </p:txBody>
-      </p:sp>
-      <p:sp>
-        <p:nvSpPr>
-          <p:cNvPr id="8" name="Text 6"/>
-          <p:cNvSpPr txBox="1"/>
-          <p:nvPr/>
-        </p:nvSpPr>
-        <p:spPr>
-          <a:xfrm>
-            <a:off x="6675120" y="2971800"/>
-            <a:ext cx="4967935" cy="594360"/>
-          </a:xfrm>
-          <a:prstGeom prst="rect">
-            <a:avLst/>
-          </a:prstGeom>
-          <a:noFill/>
-          <a:ln/>
-        </p:spPr>
-        <p:txBody>
-          <a:bodyPr wrap="square" lIns="0" tIns="0" rIns="0" bIns="0" rtlCol="0" anchor="t"/>
-          <a:lstStyle/>
-          <a:p>
-            <a:pPr indent="0" marL="0">
-              <a:buNone/>
-            </a:pPr>
-            <a:r>
-              <a:rPr lang="en-US" sz="1400" dirty="0">
-                <a:solidFill>
-                  <a:schemeClr val="tx1"/>
-                </a:solidFill>
-              </a:rPr>
-              <a:t>ブロックごとに別の図になります。メモと混ぜて書けます。</a:t>
-            </a:r>
-            <a:endParaRPr lang="en-US" sz="1400" dirty="0"/>
-          </a:p>
-        </p:txBody>
-      </p:sp>
-      <p:sp>
-        <p:nvSpPr>
-          <p:cNvPr id="9" name="Text 7"/>
-          <p:cNvSpPr txBox="1"/>
-          <p:nvPr/>
-        </p:nvSpPr>
-        <p:spPr>
-          <a:xfrm>
-            <a:off x="6675120" y="3703320"/>
-            <a:ext cx="4967935" cy="411480"/>
-          </a:xfrm>
-          <a:prstGeom prst="rect">
-            <a:avLst/>
-          </a:prstGeom>
-          <a:noFill/>
-          <a:ln/>
-        </p:spPr>
-        <p:txBody>
-          <a:bodyPr wrap="square" lIns="0" tIns="0" rIns="0" bIns="0" rtlCol="0" anchor="ctr"/>
-          <a:lstStyle/>
-          <a:p>
-            <a:pPr indent="0" marL="0">
-              <a:buNone/>
-            </a:pPr>
-            <a:r>
-              <a:rPr lang="en-US" sz="1800" b="1" dirty="0">
-                <a:solidFill>
-                  <a:schemeClr val="accent1"/>
-                </a:solidFill>
-              </a:rPr>
-              <a:t>全角の ｀｀｀ や “ ” も OK</a:t>
-            </a:r>
-            <a:endParaRPr lang="en-US" sz="1800" dirty="0"/>
-          </a:p>
-        </p:txBody>
-      </p:sp>
-      <p:sp>
-        <p:nvSpPr>
-          <p:cNvPr id="10" name="Text 8"/>
-          <p:cNvSpPr txBox="1"/>
-          <p:nvPr/>
-        </p:nvSpPr>
-        <p:spPr>
-          <a:xfrm>
-            <a:off x="6675120" y="4114800"/>
-            <a:ext cx="4967935" cy="594360"/>
-          </a:xfrm>
-          <a:prstGeom prst="rect">
-            <a:avLst/>
-          </a:prstGeom>
-          <a:noFill/>
-          <a:ln/>
-        </p:spPr>
-        <p:txBody>
-          <a:bodyPr wrap="square" lIns="0" tIns="0" rIns="0" bIns="0" rtlCol="0" anchor="t"/>
-          <a:lstStyle/>
-          <a:p>
-            <a:pPr indent="0" marL="0">
-              <a:buNone/>
-            </a:pPr>
-            <a:r>
-              <a:rPr lang="en-US" sz="1400" dirty="0">
-                <a:solidFill>
-                  <a:schemeClr val="tx1"/>
-                </a:solidFill>
-              </a:rPr>
-              <a:t>日本語入力のまま書いても自動で直します。</a:t>
-            </a:r>
-            <a:endParaRPr lang="en-US" sz="1400" dirty="0"/>
-          </a:p>
-        </p:txBody>
-      </p:sp>
-      <p:sp>
-        <p:nvSpPr>
-          <p:cNvPr id="11" name="Text 9"/>
-          <p:cNvSpPr txBox="1"/>
-          <p:nvPr/>
-        </p:nvSpPr>
-        <p:spPr>
-          <a:xfrm>
-            <a:off x="6675120" y="4846320"/>
-            <a:ext cx="4967935" cy="411480"/>
-          </a:xfrm>
-          <a:prstGeom prst="rect">
-            <a:avLst/>
-          </a:prstGeom>
-          <a:noFill/>
-          <a:ln/>
-        </p:spPr>
-        <p:txBody>
-          <a:bodyPr wrap="square" lIns="0" tIns="0" rIns="0" bIns="0" rtlCol="0" anchor="ctr"/>
-          <a:lstStyle/>
-          <a:p>
-            <a:pPr indent="0" marL="0">
-              <a:buNone/>
-            </a:pPr>
-            <a:r>
-              <a:rPr lang="en-US" sz="1800" b="1" dirty="0">
-                <a:solidFill>
-                  <a:schemeClr val="accent1"/>
-                </a:solidFill>
-              </a:rPr>
-              <a:t>図ごとにテーマを変える</a:t>
-            </a:r>
-            <a:endParaRPr lang="en-US" sz="1800" dirty="0"/>
-          </a:p>
-        </p:txBody>
-      </p:sp>
-      <p:sp>
-        <p:nvSpPr>
-          <p:cNvPr id="12" name="Text 10"/>
-          <p:cNvSpPr txBox="1"/>
-          <p:nvPr/>
-        </p:nvSpPr>
-        <p:spPr>
-          <a:xfrm>
-            <a:off x="6675120" y="5257800"/>
-            <a:ext cx="4967935" cy="594360"/>
-          </a:xfrm>
-          <a:prstGeom prst="rect">
-            <a:avLst/>
-          </a:prstGeom>
-          <a:noFill/>
-          <a:ln/>
-        </p:spPr>
-        <p:txBody>
-          <a:bodyPr wrap="square" lIns="0" tIns="0" rIns="0" bIns="0" rtlCol="0" anchor="t"/>
-          <a:lstStyle/>
-          <a:p>
-            <a:pPr indent="0" marL="0">
-              <a:buNone/>
-            </a:pPr>
-            <a:r>
-              <a:rPr lang="en-US" sz="1400" dirty="0">
-                <a:solidFill>
-                  <a:schemeClr val="tx1"/>
-                </a:solidFill>
-              </a:rPr>
-              <a:t>先頭に %%{init: {"theme": "forest"}}%% と書きます。</a:t>
-            </a:r>
-            <a:endParaRPr lang="en-US" sz="1400" dirty="0"/>
+              <a:t>コードはノートに残るので、直してもう一度押せば作り直せます。</a:t>
+            </a:r>
+            <a:endParaRPr lang="en-US" sz="1300" dirty="0"/>
           </a:p>
         </p:txBody>
       </p:sp>
@@ -4441,7 +6240,7 @@
                   <a:schemeClr val="tx2"/>
                 </a:solidFill>
               </a:rPr>
-              <a:t>ホームタブの3つのボタン</a:t>
+              <a:t>ノートの書き方</a:t>
             </a:r>
             <a:endParaRPr lang="en-US" sz="3200" dirty="0"/>
           </a:p>
@@ -4455,39 +6254,149 @@
         </p:nvSpPr>
         <p:spPr>
           <a:xfrm>
-            <a:off x="548640" y="1463040"/>
-            <a:ext cx="3515258" cy="3291840"/>
+            <a:off x="548640" y="1417320"/>
+            <a:ext cx="5669280" cy="3566160"/>
           </a:xfrm>
           <a:prstGeom prst="roundRect">
             <a:avLst>
-              <a:gd name="adj" fmla="val 3333"/>
+              <a:gd name="adj" fmla="val 3077"/>
             </a:avLst>
           </a:prstGeom>
           <a:solidFill>
-            <a:schemeClr val="bg2"/>
+            <a:schemeClr val="tx2"/>
           </a:solidFill>
           <a:ln/>
         </p:spPr>
       </p:sp>
       <p:sp>
         <p:nvSpPr>
-          <p:cNvPr id="4" name="Shape 2"/>
-          <p:cNvSpPr/>
-          <p:nvPr/>
-        </p:nvSpPr>
-        <p:spPr>
-          <a:xfrm>
-            <a:off x="822960" y="1737360"/>
-            <a:ext cx="502920" cy="502920"/>
-          </a:xfrm>
-          <a:prstGeom prst="ellipse">
-            <a:avLst/>
-          </a:prstGeom>
-          <a:solidFill>
-            <a:schemeClr val="accent2"/>
-          </a:solidFill>
-          <a:ln/>
-        </p:spPr>
+          <p:cNvPr id="4" name="Text 2"/>
+          <p:cNvSpPr txBox="1"/>
+          <p:nvPr/>
+        </p:nvSpPr>
+        <p:spPr>
+          <a:xfrm>
+            <a:off x="868680" y="1691640"/>
+            <a:ext cx="5029200" cy="3017520"/>
+          </a:xfrm>
+          <a:prstGeom prst="rect">
+            <a:avLst/>
+          </a:prstGeom>
+          <a:noFill/>
+          <a:ln/>
+        </p:spPr>
+        <p:txBody>
+          <a:bodyPr wrap="square" lIns="0" tIns="0" rIns="0" bIns="0" rtlCol="0" anchor="t"/>
+          <a:lstStyle/>
+          <a:p>
+            <a:pPr indent="0" marL="0">
+              <a:buNone/>
+            </a:pPr>
+            <a:r>
+              <a:rPr lang="en-US" sz="1800" dirty="0">
+                <a:solidFill>
+                  <a:schemeClr val="bg1"/>
+                </a:solidFill>
+                <a:latin typeface="Courier New" pitchFamily="34" charset="0"/>
+                <a:ea typeface="Courier New" pitchFamily="34" charset="-122"/>
+                <a:cs typeface="Courier New" pitchFamily="34" charset="-120"/>
+              </a:rPr>
+              <a:t>発表者メモは自由に書けます。</a:t>
+            </a:r>
+            <a:endParaRPr lang="en-US" sz="1800" dirty="0"/>
+          </a:p>
+          <a:p>
+            <a:pPr indent="0" marL="0">
+              <a:buNone/>
+            </a:pPr>
+            <a:endParaRPr lang="en-US" sz="1800" dirty="0"/>
+          </a:p>
+          <a:p>
+            <a:pPr indent="0" marL="0">
+              <a:buNone/>
+            </a:pPr>
+            <a:r>
+              <a:rPr lang="en-US" sz="1800" dirty="0">
+                <a:solidFill>
+                  <a:schemeClr val="bg1"/>
+                </a:solidFill>
+                <a:latin typeface="Courier New" pitchFamily="34" charset="0"/>
+                <a:ea typeface="Courier New" pitchFamily="34" charset="-122"/>
+                <a:cs typeface="Courier New" pitchFamily="34" charset="-120"/>
+              </a:rPr>
+              <a:t>```mermaid id=login</a:t>
+            </a:r>
+            <a:endParaRPr lang="en-US" sz="1800" dirty="0"/>
+          </a:p>
+          <a:p>
+            <a:pPr indent="0" marL="0">
+              <a:buNone/>
+            </a:pPr>
+            <a:r>
+              <a:rPr lang="en-US" sz="1800" dirty="0">
+                <a:solidFill>
+                  <a:schemeClr val="bg1"/>
+                </a:solidFill>
+                <a:latin typeface="Courier New" pitchFamily="34" charset="0"/>
+                <a:ea typeface="Courier New" pitchFamily="34" charset="-122"/>
+                <a:cs typeface="Courier New" pitchFamily="34" charset="-120"/>
+              </a:rPr>
+              <a:t>sequenceDiagram</a:t>
+            </a:r>
+            <a:endParaRPr lang="en-US" sz="1800" dirty="0"/>
+          </a:p>
+          <a:p>
+            <a:pPr indent="0" marL="0">
+              <a:buNone/>
+            </a:pPr>
+            <a:r>
+              <a:rPr lang="en-US" sz="1800" dirty="0">
+                <a:solidFill>
+                  <a:schemeClr val="bg1"/>
+                </a:solidFill>
+                <a:latin typeface="Courier New" pitchFamily="34" charset="0"/>
+                <a:ea typeface="Courier New" pitchFamily="34" charset="-122"/>
+                <a:cs typeface="Courier New" pitchFamily="34" charset="-120"/>
+              </a:rPr>
+              <a:t>  User-&gt;&gt;App: ログイン</a:t>
+            </a:r>
+            <a:endParaRPr lang="en-US" sz="1800" dirty="0"/>
+          </a:p>
+          <a:p>
+            <a:pPr indent="0" marL="0">
+              <a:buNone/>
+            </a:pPr>
+            <a:r>
+              <a:rPr lang="en-US" sz="1800" dirty="0">
+                <a:solidFill>
+                  <a:schemeClr val="bg1"/>
+                </a:solidFill>
+                <a:latin typeface="Courier New" pitchFamily="34" charset="0"/>
+                <a:ea typeface="Courier New" pitchFamily="34" charset="-122"/>
+                <a:cs typeface="Courier New" pitchFamily="34" charset="-120"/>
+              </a:rPr>
+              <a:t>  App--&gt;&gt;User: OK</a:t>
+            </a:r>
+            <a:endParaRPr lang="en-US" sz="1800" dirty="0"/>
+          </a:p>
+          <a:p>
+            <a:pPr indent="0" marL="0">
+              <a:buNone/>
+            </a:pPr>
+            <a:r>
+              <a:rPr lang="en-US" sz="1800" dirty="0">
+                <a:solidFill>
+                  <a:schemeClr val="bg1"/>
+                </a:solidFill>
+                <a:latin typeface="Courier New" pitchFamily="34" charset="0"/>
+                <a:ea typeface="Courier New" pitchFamily="34" charset="-122"/>
+                <a:cs typeface="Courier New" pitchFamily="34" charset="-120"/>
+              </a:rPr>
+              <a:t>```</a:t>
+            </a:r>
+            <a:endParaRPr lang="en-US" sz="1800" dirty="0"/>
+          </a:p>
+        </p:txBody>
       </p:sp>
       <p:sp>
         <p:nvSpPr>
@@ -4497,8 +6406,8 @@
         </p:nvSpPr>
         <p:spPr>
           <a:xfrm>
-            <a:off x="822960" y="1737360"/>
-            <a:ext cx="502920" cy="502920"/>
+            <a:off x="6675120" y="1417320"/>
+            <a:ext cx="4967935" cy="411480"/>
           </a:xfrm>
           <a:prstGeom prst="rect">
             <a:avLst/>
@@ -4510,16 +6419,16 @@
           <a:bodyPr wrap="square" lIns="0" tIns="0" rIns="0" bIns="0" rtlCol="0" anchor="ctr"/>
           <a:lstStyle/>
           <a:p>
-            <a:pPr algn="ctr" indent="0" marL="0">
+            <a:pPr indent="0" marL="0">
               <a:buNone/>
             </a:pPr>
             <a:r>
               <a:rPr lang="en-US" sz="1800" b="1" dirty="0">
                 <a:solidFill>
-                  <a:schemeClr val="bg1"/>
-                </a:solidFill>
-              </a:rPr>
-              <a:t>1</a:t>
+                  <a:schemeClr val="accent1"/>
+                </a:solidFill>
+              </a:rPr>
+              <a:t>id= で図に名前を付ける</a:t>
             </a:r>
             <a:endParaRPr lang="en-US" sz="1800" dirty="0"/>
           </a:p>
@@ -4533,31 +6442,31 @@
         </p:nvSpPr>
         <p:spPr>
           <a:xfrm>
-            <a:off x="822960" y="2468880"/>
-            <a:ext cx="2966618" cy="548640"/>
-          </a:xfrm>
-          <a:prstGeom prst="rect">
-            <a:avLst/>
-          </a:prstGeom>
-          <a:noFill/>
-          <a:ln/>
-        </p:spPr>
-        <p:txBody>
-          <a:bodyPr wrap="square" lIns="0" tIns="0" rIns="0" bIns="0" rtlCol="0" anchor="ctr"/>
-          <a:lstStyle/>
-          <a:p>
-            <a:pPr indent="0" marL="0">
-              <a:buNone/>
-            </a:pPr>
-            <a:r>
-              <a:rPr lang="en-US" sz="2200" b="1" dirty="0">
-                <a:solidFill>
-                  <a:schemeClr val="tx2"/>
-                </a:solidFill>
-              </a:rPr>
-              <a:t>図を生成</a:t>
-            </a:r>
-            <a:endParaRPr lang="en-US" sz="2200" dirty="0"/>
+            <a:off x="6675120" y="1828800"/>
+            <a:ext cx="4967935" cy="594360"/>
+          </a:xfrm>
+          <a:prstGeom prst="rect">
+            <a:avLst/>
+          </a:prstGeom>
+          <a:noFill/>
+          <a:ln/>
+        </p:spPr>
+        <p:txBody>
+          <a:bodyPr wrap="square" lIns="0" tIns="0" rIns="0" bIns="0" rtlCol="0" anchor="t"/>
+          <a:lstStyle/>
+          <a:p>
+            <a:pPr indent="0" marL="0">
+              <a:buNone/>
+            </a:pPr>
+            <a:r>
+              <a:rPr lang="en-US" sz="1400" dirty="0">
+                <a:solidFill>
+                  <a:schemeClr val="tx1"/>
+                </a:solidFill>
+              </a:rPr>
+              <a:t>省略すると出現順に 1, 2, …。並べ替えるなら付けておくと安心です。</a:t>
+            </a:r>
+            <a:endParaRPr lang="en-US" sz="1400" dirty="0"/>
           </a:p>
         </p:txBody>
       </p:sp>
@@ -4569,8 +6478,44 @@
         </p:nvSpPr>
         <p:spPr>
           <a:xfrm>
-            <a:off x="822960" y="3154680"/>
-            <a:ext cx="2966618" cy="1371600"/>
+            <a:off x="6675120" y="2560320"/>
+            <a:ext cx="4967935" cy="411480"/>
+          </a:xfrm>
+          <a:prstGeom prst="rect">
+            <a:avLst/>
+          </a:prstGeom>
+          <a:noFill/>
+          <a:ln/>
+        </p:spPr>
+        <p:txBody>
+          <a:bodyPr wrap="square" lIns="0" tIns="0" rIns="0" bIns="0" rtlCol="0" anchor="ctr"/>
+          <a:lstStyle/>
+          <a:p>
+            <a:pPr indent="0" marL="0">
+              <a:buNone/>
+            </a:pPr>
+            <a:r>
+              <a:rPr lang="en-US" sz="1800" b="1" dirty="0">
+                <a:solidFill>
+                  <a:schemeClr val="accent1"/>
+                </a:solidFill>
+              </a:rPr>
+              <a:t>fontsize= で文字の大きさ</a:t>
+            </a:r>
+            <a:endParaRPr lang="en-US" sz="1800" dirty="0"/>
+          </a:p>
+        </p:txBody>
+      </p:sp>
+      <p:sp>
+        <p:nvSpPr>
+          <p:cNvPr id="8" name="Text 6"/>
+          <p:cNvSpPr txBox="1"/>
+          <p:nvPr/>
+        </p:nvSpPr>
+        <p:spPr>
+          <a:xfrm>
+            <a:off x="6675120" y="2971800"/>
+            <a:ext cx="4967935" cy="594360"/>
           </a:xfrm>
           <a:prstGeom prst="rect">
             <a:avLst/>
@@ -4586,58 +6531,52 @@
               <a:buNone/>
             </a:pPr>
             <a:r>
-              <a:rPr lang="en-US" sz="1500" dirty="0">
+              <a:rPr lang="en-US" sz="1400" dirty="0">
                 <a:solidFill>
                   <a:schemeClr val="tx1"/>
                 </a:solidFill>
               </a:rPr>
-              <a:t>表示中のスライドの図を作る・更新する。いちばんよく使うボタンです。</a:t>
-            </a:r>
-            <a:endParaRPr lang="en-US" sz="1500" dirty="0"/>
-          </a:p>
-        </p:txBody>
-      </p:sp>
-      <p:sp>
-        <p:nvSpPr>
-          <p:cNvPr id="8" name="Shape 6"/>
-          <p:cNvSpPr/>
-          <p:nvPr/>
-        </p:nvSpPr>
-        <p:spPr>
-          <a:xfrm>
-            <a:off x="4338218" y="1463040"/>
-            <a:ext cx="3515258" cy="3291840"/>
-          </a:xfrm>
-          <a:prstGeom prst="roundRect">
-            <a:avLst>
-              <a:gd name="adj" fmla="val 3333"/>
-            </a:avLst>
-          </a:prstGeom>
-          <a:solidFill>
-            <a:schemeClr val="bg2"/>
-          </a:solidFill>
-          <a:ln/>
-        </p:spPr>
-      </p:sp>
-      <p:sp>
-        <p:nvSpPr>
-          <p:cNvPr id="9" name="Shape 7"/>
-          <p:cNvSpPr/>
-          <p:nvPr/>
-        </p:nvSpPr>
-        <p:spPr>
-          <a:xfrm>
-            <a:off x="4612538" y="1737360"/>
-            <a:ext cx="502920" cy="502920"/>
-          </a:xfrm>
-          <a:prstGeom prst="ellipse">
-            <a:avLst/>
-          </a:prstGeom>
-          <a:solidFill>
-            <a:schemeClr val="accent1"/>
-          </a:solidFill>
-          <a:ln/>
-        </p:spPr>
+              <a:t>id=login fontsize=18 のように pt で指定。省略時はパネルの設定（既定 14pt）。</a:t>
+            </a:r>
+            <a:endParaRPr lang="en-US" sz="1400" dirty="0"/>
+          </a:p>
+        </p:txBody>
+      </p:sp>
+      <p:sp>
+        <p:nvSpPr>
+          <p:cNvPr id="9" name="Text 7"/>
+          <p:cNvSpPr txBox="1"/>
+          <p:nvPr/>
+        </p:nvSpPr>
+        <p:spPr>
+          <a:xfrm>
+            <a:off x="6675120" y="3703320"/>
+            <a:ext cx="4967935" cy="411480"/>
+          </a:xfrm>
+          <a:prstGeom prst="rect">
+            <a:avLst/>
+          </a:prstGeom>
+          <a:noFill/>
+          <a:ln/>
+        </p:spPr>
+        <p:txBody>
+          <a:bodyPr wrap="square" lIns="0" tIns="0" rIns="0" bIns="0" rtlCol="0" anchor="ctr"/>
+          <a:lstStyle/>
+          <a:p>
+            <a:pPr indent="0" marL="0">
+              <a:buNone/>
+            </a:pPr>
+            <a:r>
+              <a:rPr lang="en-US" sz="1800" b="1" dirty="0">
+                <a:solidFill>
+                  <a:schemeClr val="accent1"/>
+                </a:solidFill>
+              </a:rPr>
+              <a:t>全角の ｀｀｀ や “ ” も OK</a:t>
+            </a:r>
+            <a:endParaRPr lang="en-US" sz="1800" dirty="0"/>
+          </a:p>
+        </p:txBody>
       </p:sp>
       <p:sp>
         <p:nvSpPr>
@@ -4647,31 +6586,31 @@
         </p:nvSpPr>
         <p:spPr>
           <a:xfrm>
-            <a:off x="4612538" y="1737360"/>
-            <a:ext cx="502920" cy="502920"/>
-          </a:xfrm>
-          <a:prstGeom prst="rect">
-            <a:avLst/>
-          </a:prstGeom>
-          <a:noFill/>
-          <a:ln/>
-        </p:spPr>
-        <p:txBody>
-          <a:bodyPr wrap="square" lIns="0" tIns="0" rIns="0" bIns="0" rtlCol="0" anchor="ctr"/>
-          <a:lstStyle/>
-          <a:p>
-            <a:pPr algn="ctr" indent="0" marL="0">
-              <a:buNone/>
-            </a:pPr>
-            <a:r>
-              <a:rPr lang="en-US" sz="1800" b="1" dirty="0">
-                <a:solidFill>
-                  <a:schemeClr val="bg1"/>
-                </a:solidFill>
-              </a:rPr>
-              <a:t>2</a:t>
-            </a:r>
-            <a:endParaRPr lang="en-US" sz="1800" dirty="0"/>
+            <a:off x="6675120" y="4114800"/>
+            <a:ext cx="4967935" cy="594360"/>
+          </a:xfrm>
+          <a:prstGeom prst="rect">
+            <a:avLst/>
+          </a:prstGeom>
+          <a:noFill/>
+          <a:ln/>
+        </p:spPr>
+        <p:txBody>
+          <a:bodyPr wrap="square" lIns="0" tIns="0" rIns="0" bIns="0" rtlCol="0" anchor="t"/>
+          <a:lstStyle/>
+          <a:p>
+            <a:pPr indent="0" marL="0">
+              <a:buNone/>
+            </a:pPr>
+            <a:r>
+              <a:rPr lang="en-US" sz="1400" dirty="0">
+                <a:solidFill>
+                  <a:schemeClr val="tx1"/>
+                </a:solidFill>
+              </a:rPr>
+              <a:t>日本語入力のまま書いても自動で直します。</a:t>
+            </a:r>
+            <a:endParaRPr lang="en-US" sz="1400" dirty="0"/>
           </a:p>
         </p:txBody>
       </p:sp>
@@ -4683,8 +6622,8 @@
         </p:nvSpPr>
         <p:spPr>
           <a:xfrm>
-            <a:off x="4612538" y="2468880"/>
-            <a:ext cx="2966618" cy="548640"/>
+            <a:off x="6675120" y="4846320"/>
+            <a:ext cx="4967935" cy="411480"/>
           </a:xfrm>
           <a:prstGeom prst="rect">
             <a:avLst/>
@@ -4700,14 +6639,14 @@
               <a:buNone/>
             </a:pPr>
             <a:r>
-              <a:rPr lang="en-US" sz="2200" b="1" dirty="0">
-                <a:solidFill>
-                  <a:schemeClr val="tx2"/>
-                </a:solidFill>
-              </a:rPr>
-              <a:t>全スライドを更新</a:t>
-            </a:r>
-            <a:endParaRPr lang="en-US" sz="2200" dirty="0"/>
+              <a:rPr lang="en-US" sz="1800" b="1" dirty="0">
+                <a:solidFill>
+                  <a:schemeClr val="accent1"/>
+                </a:solidFill>
+              </a:rPr>
+              <a:t>図ごとにテーマを変える</a:t>
+            </a:r>
+            <a:endParaRPr lang="en-US" sz="1800" dirty="0"/>
           </a:p>
         </p:txBody>
       </p:sp>
@@ -4719,8 +6658,8 @@
         </p:nvSpPr>
         <p:spPr>
           <a:xfrm>
-            <a:off x="4612538" y="3154680"/>
-            <a:ext cx="2966618" cy="1371600"/>
+            <a:off x="6675120" y="5257800"/>
+            <a:ext cx="4967935" cy="594360"/>
           </a:xfrm>
           <a:prstGeom prst="rect">
             <a:avLst/>
@@ -4736,200 +6675,14 @@
               <a:buNone/>
             </a:pPr>
             <a:r>
-              <a:rPr lang="en-US" sz="1500" dirty="0">
+              <a:rPr lang="en-US" sz="1400" dirty="0">
                 <a:solidFill>
                   <a:schemeClr val="tx1"/>
                 </a:solidFill>
               </a:rPr>
-              <a:t>すべてのスライドで同じことをします。テーマを変えた後にも使います。</a:t>
-            </a:r>
-            <a:endParaRPr lang="en-US" sz="1500" dirty="0"/>
-          </a:p>
-        </p:txBody>
-      </p:sp>
-      <p:sp>
-        <p:nvSpPr>
-          <p:cNvPr id="13" name="Shape 11"/>
-          <p:cNvSpPr/>
-          <p:nvPr/>
-        </p:nvSpPr>
-        <p:spPr>
-          <a:xfrm>
-            <a:off x="8127797" y="1463040"/>
-            <a:ext cx="3515258" cy="3291840"/>
-          </a:xfrm>
-          <a:prstGeom prst="roundRect">
-            <a:avLst>
-              <a:gd name="adj" fmla="val 3333"/>
-            </a:avLst>
-          </a:prstGeom>
-          <a:solidFill>
-            <a:schemeClr val="bg2"/>
-          </a:solidFill>
-          <a:ln/>
-        </p:spPr>
-      </p:sp>
-      <p:sp>
-        <p:nvSpPr>
-          <p:cNvPr id="14" name="Shape 12"/>
-          <p:cNvSpPr/>
-          <p:nvPr/>
-        </p:nvSpPr>
-        <p:spPr>
-          <a:xfrm>
-            <a:off x="8402117" y="1737360"/>
-            <a:ext cx="502920" cy="502920"/>
-          </a:xfrm>
-          <a:prstGeom prst="ellipse">
-            <a:avLst/>
-          </a:prstGeom>
-          <a:solidFill>
-            <a:schemeClr val="accent1"/>
-          </a:solidFill>
-          <a:ln/>
-        </p:spPr>
-      </p:sp>
-      <p:sp>
-        <p:nvSpPr>
-          <p:cNvPr id="15" name="Text 13"/>
-          <p:cNvSpPr txBox="1"/>
-          <p:nvPr/>
-        </p:nvSpPr>
-        <p:spPr>
-          <a:xfrm>
-            <a:off x="8402117" y="1737360"/>
-            <a:ext cx="502920" cy="502920"/>
-          </a:xfrm>
-          <a:prstGeom prst="rect">
-            <a:avLst/>
-          </a:prstGeom>
-          <a:noFill/>
-          <a:ln/>
-        </p:spPr>
-        <p:txBody>
-          <a:bodyPr wrap="square" lIns="0" tIns="0" rIns="0" bIns="0" rtlCol="0" anchor="ctr"/>
-          <a:lstStyle/>
-          <a:p>
-            <a:pPr algn="ctr" indent="0" marL="0">
-              <a:buNone/>
-            </a:pPr>
-            <a:r>
-              <a:rPr lang="en-US" sz="1800" b="1" dirty="0">
-                <a:solidFill>
-                  <a:schemeClr val="bg1"/>
-                </a:solidFill>
-              </a:rPr>
-              <a:t>3</a:t>
-            </a:r>
-            <a:endParaRPr lang="en-US" sz="1800" dirty="0"/>
-          </a:p>
-        </p:txBody>
-      </p:sp>
-      <p:sp>
-        <p:nvSpPr>
-          <p:cNvPr id="16" name="Text 14"/>
-          <p:cNvSpPr txBox="1"/>
-          <p:nvPr/>
-        </p:nvSpPr>
-        <p:spPr>
-          <a:xfrm>
-            <a:off x="8402117" y="2468880"/>
-            <a:ext cx="2966618" cy="548640"/>
-          </a:xfrm>
-          <a:prstGeom prst="rect">
-            <a:avLst/>
-          </a:prstGeom>
-          <a:noFill/>
-          <a:ln/>
-        </p:spPr>
-        <p:txBody>
-          <a:bodyPr wrap="square" lIns="0" tIns="0" rIns="0" bIns="0" rtlCol="0" anchor="ctr"/>
-          <a:lstStyle/>
-          <a:p>
-            <a:pPr indent="0" marL="0">
-              <a:buNone/>
-            </a:pPr>
-            <a:r>
-              <a:rPr lang="en-US" sz="2200" b="1" dirty="0">
-                <a:solidFill>
-                  <a:schemeClr val="tx2"/>
-                </a:solidFill>
-              </a:rPr>
-              <a:t>パネルを表示</a:t>
-            </a:r>
-            <a:endParaRPr lang="en-US" sz="2200" dirty="0"/>
-          </a:p>
-        </p:txBody>
-      </p:sp>
-      <p:sp>
-        <p:nvSpPr>
-          <p:cNvPr id="17" name="Text 15"/>
-          <p:cNvSpPr txBox="1"/>
-          <p:nvPr/>
-        </p:nvSpPr>
-        <p:spPr>
-          <a:xfrm>
-            <a:off x="8402117" y="3154680"/>
-            <a:ext cx="2966618" cy="1371600"/>
-          </a:xfrm>
-          <a:prstGeom prst="rect">
-            <a:avLst/>
-          </a:prstGeom>
-          <a:noFill/>
-          <a:ln/>
-        </p:spPr>
-        <p:txBody>
-          <a:bodyPr wrap="square" lIns="0" tIns="0" rIns="0" bIns="0" rtlCol="0" anchor="t"/>
-          <a:lstStyle/>
-          <a:p>
-            <a:pPr indent="0" marL="0">
-              <a:buNone/>
-            </a:pPr>
-            <a:r>
-              <a:rPr lang="en-US" sz="1500" dirty="0">
-                <a:solidFill>
-                  <a:schemeClr val="tx1"/>
-                </a:solidFill>
-              </a:rPr>
-              <a:t>テーマを選ぶ、結果を確認する、「変更が無い図も作り直す」を指定する。</a:t>
-            </a:r>
-            <a:endParaRPr lang="en-US" sz="1500" dirty="0"/>
-          </a:p>
-        </p:txBody>
-      </p:sp>
-      <p:sp>
-        <p:nvSpPr>
-          <p:cNvPr id="18" name="Text 16"/>
-          <p:cNvSpPr txBox="1"/>
-          <p:nvPr/>
-        </p:nvSpPr>
-        <p:spPr>
-          <a:xfrm>
-            <a:off x="548640" y="5029200"/>
-            <a:ext cx="11094415" cy="365760"/>
-          </a:xfrm>
-          <a:prstGeom prst="rect">
-            <a:avLst/>
-          </a:prstGeom>
-          <a:noFill/>
-          <a:ln/>
-        </p:spPr>
-        <p:txBody>
-          <a:bodyPr wrap="square" lIns="0" tIns="0" rIns="0" bIns="0" rtlCol="0" anchor="ctr"/>
-          <a:lstStyle/>
-          <a:p>
-            <a:pPr indent="0" marL="0">
-              <a:buNone/>
-            </a:pPr>
-            <a:r>
-              <a:rPr lang="en-US" sz="1600" dirty="0">
-                <a:solidFill>
-                  <a:schemeClr val="accent3"/>
-                </a:solidFill>
-              </a:rPr>
-              <a:t>エラーがあるときは、パネルが自動で開いてノートの何行目かを表示します。</a:t>
-            </a:r>
-            <a:endParaRPr lang="en-US" sz="1600" dirty="0"/>
+              <a:t>先頭に %%{init: {"theme": "forest"}}%% と書きます。</a:t>
+            </a:r>
+            <a:endParaRPr lang="en-US" sz="1400" dirty="0"/>
           </a:p>
         </p:txBody>
       </p:sp>
@@ -5035,40 +6788,480 @@
                   <a:schemeClr val="tx2"/>
                 </a:solidFill>
               </a:rPr>
-              <a:t>図はこう更新されます</a:t>
+              <a:t>ホームタブの3つのボタン</a:t>
             </a:r>
             <a:endParaRPr lang="en-US" sz="3200" dirty="0"/>
+          </a:p>
+        </p:txBody>
+      </p:sp>
+      <p:sp>
+        <p:nvSpPr>
+          <p:cNvPr id="3" name="Shape 1"/>
+          <p:cNvSpPr/>
+          <p:nvPr/>
+        </p:nvSpPr>
+        <p:spPr>
+          <a:xfrm>
+            <a:off x="548640" y="1463040"/>
+            <a:ext cx="3515258" cy="3291840"/>
+          </a:xfrm>
+          <a:prstGeom prst="roundRect">
+            <a:avLst>
+              <a:gd name="adj" fmla="val 3333"/>
+            </a:avLst>
+          </a:prstGeom>
+          <a:solidFill>
+            <a:schemeClr val="bg2"/>
+          </a:solidFill>
+          <a:ln/>
+        </p:spPr>
+      </p:sp>
+      <p:sp>
+        <p:nvSpPr>
+          <p:cNvPr id="4" name="Shape 2"/>
+          <p:cNvSpPr/>
+          <p:nvPr/>
+        </p:nvSpPr>
+        <p:spPr>
+          <a:xfrm>
+            <a:off x="822960" y="1737360"/>
+            <a:ext cx="502920" cy="502920"/>
+          </a:xfrm>
+          <a:prstGeom prst="ellipse">
+            <a:avLst/>
+          </a:prstGeom>
+          <a:solidFill>
+            <a:schemeClr val="accent2"/>
+          </a:solidFill>
+          <a:ln/>
+        </p:spPr>
+      </p:sp>
+      <p:sp>
+        <p:nvSpPr>
+          <p:cNvPr id="5" name="Text 3"/>
+          <p:cNvSpPr txBox="1"/>
+          <p:nvPr/>
+        </p:nvSpPr>
+        <p:spPr>
+          <a:xfrm>
+            <a:off x="822960" y="1737360"/>
+            <a:ext cx="502920" cy="502920"/>
+          </a:xfrm>
+          <a:prstGeom prst="rect">
+            <a:avLst/>
+          </a:prstGeom>
+          <a:noFill/>
+          <a:ln/>
+        </p:spPr>
+        <p:txBody>
+          <a:bodyPr wrap="square" lIns="0" tIns="0" rIns="0" bIns="0" rtlCol="0" anchor="ctr"/>
+          <a:lstStyle/>
+          <a:p>
+            <a:pPr algn="ctr" indent="0" marL="0">
+              <a:buNone/>
+            </a:pPr>
+            <a:r>
+              <a:rPr lang="en-US" sz="1800" b="1" dirty="0">
+                <a:solidFill>
+                  <a:schemeClr val="bg1"/>
+                </a:solidFill>
+              </a:rPr>
+              <a:t>1</a:t>
+            </a:r>
+            <a:endParaRPr lang="en-US" sz="1800" dirty="0"/>
+          </a:p>
+        </p:txBody>
+      </p:sp>
+      <p:sp>
+        <p:nvSpPr>
+          <p:cNvPr id="6" name="Text 4"/>
+          <p:cNvSpPr txBox="1"/>
+          <p:nvPr/>
+        </p:nvSpPr>
+        <p:spPr>
+          <a:xfrm>
+            <a:off x="822960" y="2468880"/>
+            <a:ext cx="2966618" cy="548640"/>
+          </a:xfrm>
+          <a:prstGeom prst="rect">
+            <a:avLst/>
+          </a:prstGeom>
+          <a:noFill/>
+          <a:ln/>
+        </p:spPr>
+        <p:txBody>
+          <a:bodyPr wrap="square" lIns="0" tIns="0" rIns="0" bIns="0" rtlCol="0" anchor="ctr"/>
+          <a:lstStyle/>
+          <a:p>
+            <a:pPr indent="0" marL="0">
+              <a:buNone/>
+            </a:pPr>
+            <a:r>
+              <a:rPr lang="en-US" sz="2200" b="1" dirty="0">
+                <a:solidFill>
+                  <a:schemeClr val="tx2"/>
+                </a:solidFill>
+              </a:rPr>
+              <a:t>図を生成</a:t>
+            </a:r>
+            <a:endParaRPr lang="en-US" sz="2200" dirty="0"/>
+          </a:p>
+        </p:txBody>
+      </p:sp>
+      <p:sp>
+        <p:nvSpPr>
+          <p:cNvPr id="7" name="Text 5"/>
+          <p:cNvSpPr txBox="1"/>
+          <p:nvPr/>
+        </p:nvSpPr>
+        <p:spPr>
+          <a:xfrm>
+            <a:off x="822960" y="3154680"/>
+            <a:ext cx="2966618" cy="1371600"/>
+          </a:xfrm>
+          <a:prstGeom prst="rect">
+            <a:avLst/>
+          </a:prstGeom>
+          <a:noFill/>
+          <a:ln/>
+        </p:spPr>
+        <p:txBody>
+          <a:bodyPr wrap="square" lIns="0" tIns="0" rIns="0" bIns="0" rtlCol="0" anchor="t"/>
+          <a:lstStyle/>
+          <a:p>
+            <a:pPr indent="0" marL="0">
+              <a:buNone/>
+            </a:pPr>
+            <a:r>
+              <a:rPr lang="en-US" sz="1500" dirty="0">
+                <a:solidFill>
+                  <a:schemeClr val="tx1"/>
+                </a:solidFill>
+              </a:rPr>
+              <a:t>表示中のスライドの図を作る・更新する。いちばんよく使うボタンです。</a:t>
+            </a:r>
+            <a:endParaRPr lang="en-US" sz="1500" dirty="0"/>
+          </a:p>
+        </p:txBody>
+      </p:sp>
+      <p:sp>
+        <p:nvSpPr>
+          <p:cNvPr id="8" name="Shape 6"/>
+          <p:cNvSpPr/>
+          <p:nvPr/>
+        </p:nvSpPr>
+        <p:spPr>
+          <a:xfrm>
+            <a:off x="4338218" y="1463040"/>
+            <a:ext cx="3515258" cy="3291840"/>
+          </a:xfrm>
+          <a:prstGeom prst="roundRect">
+            <a:avLst>
+              <a:gd name="adj" fmla="val 3333"/>
+            </a:avLst>
+          </a:prstGeom>
+          <a:solidFill>
+            <a:schemeClr val="bg2"/>
+          </a:solidFill>
+          <a:ln/>
+        </p:spPr>
+      </p:sp>
+      <p:sp>
+        <p:nvSpPr>
+          <p:cNvPr id="9" name="Shape 7"/>
+          <p:cNvSpPr/>
+          <p:nvPr/>
+        </p:nvSpPr>
+        <p:spPr>
+          <a:xfrm>
+            <a:off x="4612538" y="1737360"/>
+            <a:ext cx="502920" cy="502920"/>
+          </a:xfrm>
+          <a:prstGeom prst="ellipse">
+            <a:avLst/>
+          </a:prstGeom>
+          <a:solidFill>
+            <a:schemeClr val="accent1"/>
+          </a:solidFill>
+          <a:ln/>
+        </p:spPr>
+      </p:sp>
+      <p:sp>
+        <p:nvSpPr>
+          <p:cNvPr id="10" name="Text 8"/>
+          <p:cNvSpPr txBox="1"/>
+          <p:nvPr/>
+        </p:nvSpPr>
+        <p:spPr>
+          <a:xfrm>
+            <a:off x="4612538" y="1737360"/>
+            <a:ext cx="502920" cy="502920"/>
+          </a:xfrm>
+          <a:prstGeom prst="rect">
+            <a:avLst/>
+          </a:prstGeom>
+          <a:noFill/>
+          <a:ln/>
+        </p:spPr>
+        <p:txBody>
+          <a:bodyPr wrap="square" lIns="0" tIns="0" rIns="0" bIns="0" rtlCol="0" anchor="ctr"/>
+          <a:lstStyle/>
+          <a:p>
+            <a:pPr algn="ctr" indent="0" marL="0">
+              <a:buNone/>
+            </a:pPr>
+            <a:r>
+              <a:rPr lang="en-US" sz="1800" b="1" dirty="0">
+                <a:solidFill>
+                  <a:schemeClr val="bg1"/>
+                </a:solidFill>
+              </a:rPr>
+              <a:t>2</a:t>
+            </a:r>
+            <a:endParaRPr lang="en-US" sz="1800" dirty="0"/>
+          </a:p>
+        </p:txBody>
+      </p:sp>
+      <p:sp>
+        <p:nvSpPr>
+          <p:cNvPr id="11" name="Text 9"/>
+          <p:cNvSpPr txBox="1"/>
+          <p:nvPr/>
+        </p:nvSpPr>
+        <p:spPr>
+          <a:xfrm>
+            <a:off x="4612538" y="2468880"/>
+            <a:ext cx="2966618" cy="548640"/>
+          </a:xfrm>
+          <a:prstGeom prst="rect">
+            <a:avLst/>
+          </a:prstGeom>
+          <a:noFill/>
+          <a:ln/>
+        </p:spPr>
+        <p:txBody>
+          <a:bodyPr wrap="square" lIns="0" tIns="0" rIns="0" bIns="0" rtlCol="0" anchor="ctr"/>
+          <a:lstStyle/>
+          <a:p>
+            <a:pPr indent="0" marL="0">
+              <a:buNone/>
+            </a:pPr>
+            <a:r>
+              <a:rPr lang="en-US" sz="2200" b="1" dirty="0">
+                <a:solidFill>
+                  <a:schemeClr val="tx2"/>
+                </a:solidFill>
+              </a:rPr>
+              <a:t>全スライドを更新</a:t>
+            </a:r>
+            <a:endParaRPr lang="en-US" sz="2200" dirty="0"/>
+          </a:p>
+        </p:txBody>
+      </p:sp>
+      <p:sp>
+        <p:nvSpPr>
+          <p:cNvPr id="12" name="Text 10"/>
+          <p:cNvSpPr txBox="1"/>
+          <p:nvPr/>
+        </p:nvSpPr>
+        <p:spPr>
+          <a:xfrm>
+            <a:off x="4612538" y="3154680"/>
+            <a:ext cx="2966618" cy="1371600"/>
+          </a:xfrm>
+          <a:prstGeom prst="rect">
+            <a:avLst/>
+          </a:prstGeom>
+          <a:noFill/>
+          <a:ln/>
+        </p:spPr>
+        <p:txBody>
+          <a:bodyPr wrap="square" lIns="0" tIns="0" rIns="0" bIns="0" rtlCol="0" anchor="t"/>
+          <a:lstStyle/>
+          <a:p>
+            <a:pPr indent="0" marL="0">
+              <a:buNone/>
+            </a:pPr>
+            <a:r>
+              <a:rPr lang="en-US" sz="1500" dirty="0">
+                <a:solidFill>
+                  <a:schemeClr val="tx1"/>
+                </a:solidFill>
+              </a:rPr>
+              <a:t>すべてのスライドで同じことをします。テーマを変えた後にも使います。</a:t>
+            </a:r>
+            <a:endParaRPr lang="en-US" sz="1500" dirty="0"/>
+          </a:p>
+        </p:txBody>
+      </p:sp>
+      <p:sp>
+        <p:nvSpPr>
+          <p:cNvPr id="13" name="Shape 11"/>
+          <p:cNvSpPr/>
+          <p:nvPr/>
+        </p:nvSpPr>
+        <p:spPr>
+          <a:xfrm>
+            <a:off x="8127797" y="1463040"/>
+            <a:ext cx="3515258" cy="3291840"/>
+          </a:xfrm>
+          <a:prstGeom prst="roundRect">
+            <a:avLst>
+              <a:gd name="adj" fmla="val 3333"/>
+            </a:avLst>
+          </a:prstGeom>
+          <a:solidFill>
+            <a:schemeClr val="bg2"/>
+          </a:solidFill>
+          <a:ln/>
+        </p:spPr>
+      </p:sp>
+      <p:sp>
+        <p:nvSpPr>
+          <p:cNvPr id="14" name="Shape 12"/>
+          <p:cNvSpPr/>
+          <p:nvPr/>
+        </p:nvSpPr>
+        <p:spPr>
+          <a:xfrm>
+            <a:off x="8402117" y="1737360"/>
+            <a:ext cx="502920" cy="502920"/>
+          </a:xfrm>
+          <a:prstGeom prst="ellipse">
+            <a:avLst/>
+          </a:prstGeom>
+          <a:solidFill>
+            <a:schemeClr val="accent1"/>
+          </a:solidFill>
+          <a:ln/>
+        </p:spPr>
+      </p:sp>
+      <p:sp>
+        <p:nvSpPr>
+          <p:cNvPr id="15" name="Text 13"/>
+          <p:cNvSpPr txBox="1"/>
+          <p:nvPr/>
+        </p:nvSpPr>
+        <p:spPr>
+          <a:xfrm>
+            <a:off x="8402117" y="1737360"/>
+            <a:ext cx="502920" cy="502920"/>
+          </a:xfrm>
+          <a:prstGeom prst="rect">
+            <a:avLst/>
+          </a:prstGeom>
+          <a:noFill/>
+          <a:ln/>
+        </p:spPr>
+        <p:txBody>
+          <a:bodyPr wrap="square" lIns="0" tIns="0" rIns="0" bIns="0" rtlCol="0" anchor="ctr"/>
+          <a:lstStyle/>
+          <a:p>
+            <a:pPr algn="ctr" indent="0" marL="0">
+              <a:buNone/>
+            </a:pPr>
+            <a:r>
+              <a:rPr lang="en-US" sz="1800" b="1" dirty="0">
+                <a:solidFill>
+                  <a:schemeClr val="bg1"/>
+                </a:solidFill>
+              </a:rPr>
+              <a:t>3</a:t>
+            </a:r>
+            <a:endParaRPr lang="en-US" sz="1800" dirty="0"/>
+          </a:p>
+        </p:txBody>
+      </p:sp>
+      <p:sp>
+        <p:nvSpPr>
+          <p:cNvPr id="16" name="Text 14"/>
+          <p:cNvSpPr txBox="1"/>
+          <p:nvPr/>
+        </p:nvSpPr>
+        <p:spPr>
+          <a:xfrm>
+            <a:off x="8402117" y="2468880"/>
+            <a:ext cx="2966618" cy="548640"/>
+          </a:xfrm>
+          <a:prstGeom prst="rect">
+            <a:avLst/>
+          </a:prstGeom>
+          <a:noFill/>
+          <a:ln/>
+        </p:spPr>
+        <p:txBody>
+          <a:bodyPr wrap="square" lIns="0" tIns="0" rIns="0" bIns="0" rtlCol="0" anchor="ctr"/>
+          <a:lstStyle/>
+          <a:p>
+            <a:pPr indent="0" marL="0">
+              <a:buNone/>
+            </a:pPr>
+            <a:r>
+              <a:rPr lang="en-US" sz="2200" b="1" dirty="0">
+                <a:solidFill>
+                  <a:schemeClr val="tx2"/>
+                </a:solidFill>
+              </a:rPr>
+              <a:t>パネルを表示</a:t>
+            </a:r>
+            <a:endParaRPr lang="en-US" sz="2200" dirty="0"/>
+          </a:p>
+        </p:txBody>
+      </p:sp>
+      <p:sp>
+        <p:nvSpPr>
+          <p:cNvPr id="17" name="Text 15"/>
+          <p:cNvSpPr txBox="1"/>
+          <p:nvPr/>
+        </p:nvSpPr>
+        <p:spPr>
+          <a:xfrm>
+            <a:off x="8402117" y="3154680"/>
+            <a:ext cx="2966618" cy="1371600"/>
+          </a:xfrm>
+          <a:prstGeom prst="rect">
+            <a:avLst/>
+          </a:prstGeom>
+          <a:noFill/>
+          <a:ln/>
+        </p:spPr>
+        <p:txBody>
+          <a:bodyPr wrap="square" lIns="0" tIns="0" rIns="0" bIns="0" rtlCol="0" anchor="t"/>
+          <a:lstStyle/>
+          <a:p>
+            <a:pPr indent="0" marL="0">
+              <a:buNone/>
+            </a:pPr>
+            <a:r>
+              <a:rPr lang="en-US" sz="1500" dirty="0">
+                <a:solidFill>
+                  <a:schemeClr val="tx1"/>
+                </a:solidFill>
+              </a:rPr>
+              <a:t>テーマと文字の大きさを選ぶ、結果を確認する、「変更が無い図も作り直す」を指定する。</a:t>
+            </a:r>
+            <a:endParaRPr lang="en-US" sz="1500" dirty="0"/>
           </a:p>
         </p:txBody>
       </p:sp>
       <p:pic>
         <p:nvPicPr>
-          <p:cNvPr id="3" name="Mermaid: update" descr="flowchart LR&#10;  N[&quot;ノートの&lt;br/&gt;mermaid ブロック&quot;] --&gt; Q1{&quot;同じ id の図が&lt;br/&gt;ある？&quot;}&#10;  Q1 -- ない --&gt; ADD[&quot;新しく図を入れる&quot;]&#10;  Q1 -- ある --&gt; Q2{&quot;コードとテーマが&lt;br/&gt;前と同じ？&quot;}&#10;  Q2 -- 同じ --&gt; KEEP[&quot;何もしない&quot;]&#10;  Q2 -- 違う --&gt; REP[&quot;位置と横幅を保って&lt;br/&gt;置き換える&quot;]" title="Mermaid: update">    </p:cNvPr>
+          <p:cNvPr id="18" name="Image 0" descr="画面: E-ribbon-large">    </p:cNvPr>
           <p:cNvPicPr>
             <a:picLocks noChangeAspect="1"/>
           </p:cNvPicPr>
-          <p:nvPr>
-            <p:custDataLst>
-              <p:tags r:id="rId5"/>
-            </p:custDataLst>
-          </p:nvPr>
+          <p:nvPr/>
         </p:nvPicPr>
         <p:blipFill>
-          <a:blip r:embed="rId1">
-            <a:extLst>
-              <a:ext uri="{96DAC541-7B7A-43D3-8B79-37D633B846F1}">
-                <asvg:svgBlip xmlns:asvg="http://schemas.microsoft.com/office/drawing/2016/SVG/main" r:embed="rId4"/>
-              </a:ext>
-            </a:extLst>
-          </a:blip>
+          <a:blip r:embed="rId1"/>
           <a:stretch>
             <a:fillRect/>
           </a:stretch>
         </p:blipFill>
         <p:spPr>
           <a:xfrm>
-            <a:off x="1098593" y="1325880"/>
-            <a:ext cx="9994509" cy="3108960"/>
+            <a:off x="548640" y="4937760"/>
+            <a:ext cx="1703070" cy="1188720"/>
           </a:xfrm>
           <a:prstGeom prst="rect">
             <a:avLst/>
@@ -5077,81 +7270,45 @@
       </p:pic>
       <p:sp>
         <p:nvSpPr>
-          <p:cNvPr id="4" name="card"/>
+          <p:cNvPr id="19" name="Shape 16"/>
           <p:cNvSpPr/>
           <p:nvPr/>
         </p:nvSpPr>
         <p:spPr>
           <a:xfrm>
-            <a:off x="548640" y="4572000"/>
-            <a:ext cx="3515258" cy="1600200"/>
-          </a:xfrm>
-          <a:prstGeom prst="roundRect">
-            <a:avLst>
-              <a:gd name="adj" fmla="val 6857"/>
-            </a:avLst>
-          </a:prstGeom>
-          <a:solidFill>
-            <a:schemeClr val="bg2"/>
-          </a:solidFill>
-          <a:ln/>
-        </p:spPr>
-      </p:sp>
-      <p:sp>
-        <p:nvSpPr>
-          <p:cNvPr id="5" name="Text 2"/>
+            <a:off x="548640" y="4937760"/>
+            <a:ext cx="1703070" cy="1188720"/>
+          </a:xfrm>
+          <a:prstGeom prst="rect">
+            <a:avLst/>
+          </a:prstGeom>
+          <a:ln w="9525">
+            <a:solidFill>
+              <a:srgbClr val="CBD5E1"/>
+            </a:solidFill>
+            <a:prstDash val="solid"/>
+          </a:ln>
+        </p:spPr>
+      </p:sp>
+      <p:sp>
+        <p:nvSpPr>
+          <p:cNvPr id="20" name="Text 17"/>
           <p:cNvSpPr txBox="1"/>
           <p:nvPr/>
         </p:nvSpPr>
         <p:spPr>
           <a:xfrm>
-            <a:off x="777240" y="4754880"/>
-            <a:ext cx="3058058" cy="457200"/>
-          </a:xfrm>
-          <a:prstGeom prst="rect">
-            <a:avLst/>
-          </a:prstGeom>
-          <a:noFill/>
-          <a:ln/>
-        </p:spPr>
-        <p:txBody>
-          <a:bodyPr wrap="square" lIns="0" tIns="0" rIns="0" bIns="0" rtlCol="0" anchor="t"/>
-          <a:lstStyle/>
-          <a:p>
-            <a:pPr indent="0" marL="0">
-              <a:buNone/>
-            </a:pPr>
-            <a:r>
-              <a:rPr lang="en-US" sz="1800" b="1" dirty="0">
-                <a:solidFill>
-                  <a:schemeClr val="tx2"/>
-                </a:solidFill>
-              </a:rPr>
-              <a:t>何度押しても安心</a:t>
-            </a:r>
-            <a:endParaRPr lang="en-US" sz="1800" dirty="0"/>
-          </a:p>
-        </p:txBody>
-      </p:sp>
-      <p:sp>
-        <p:nvSpPr>
-          <p:cNvPr id="6" name="Text 3"/>
-          <p:cNvSpPr txBox="1"/>
-          <p:nvPr/>
-        </p:nvSpPr>
-        <p:spPr>
-          <a:xfrm>
-            <a:off x="777240" y="5257800"/>
-            <a:ext cx="3058058" cy="731520"/>
-          </a:xfrm>
-          <a:prstGeom prst="rect">
-            <a:avLst/>
-          </a:prstGeom>
-          <a:noFill/>
-          <a:ln/>
-        </p:spPr>
-        <p:txBody>
-          <a:bodyPr wrap="square" lIns="0" tIns="0" rIns="0" bIns="0" rtlCol="0" anchor="t"/>
+            <a:off x="2560320" y="5029200"/>
+            <a:ext cx="9082735" cy="914400"/>
+          </a:xfrm>
+          <a:prstGeom prst="rect">
+            <a:avLst/>
+          </a:prstGeom>
+          <a:noFill/>
+          <a:ln/>
+        </p:spPr>
+        <p:txBody>
+          <a:bodyPr wrap="square" lIns="0" tIns="0" rIns="0" bIns="0" rtlCol="0" anchor="ctr"/>
           <a:lstStyle/>
           <a:p>
             <a:pPr indent="0" marL="0">
@@ -5161,95 +7318,15 @@
               <a:buNone/>
             </a:pPr>
             <a:r>
-              <a:rPr lang="en-US" sz="1400" dirty="0">
-                <a:solidFill>
-                  <a:schemeClr val="tx1"/>
-                </a:solidFill>
-              </a:rPr>
-              <a:t>変更が無い図には触りません。</a:t>
-            </a:r>
-            <a:endParaRPr lang="en-US" sz="1400" dirty="0"/>
-          </a:p>
-        </p:txBody>
-      </p:sp>
-      <p:sp>
-        <p:nvSpPr>
-          <p:cNvPr id="7" name="card"/>
-          <p:cNvSpPr/>
-          <p:nvPr/>
-        </p:nvSpPr>
-        <p:spPr>
-          <a:xfrm>
-            <a:off x="4338218" y="4572000"/>
-            <a:ext cx="3515258" cy="1600200"/>
-          </a:xfrm>
-          <a:prstGeom prst="roundRect">
-            <a:avLst>
-              <a:gd name="adj" fmla="val 6857"/>
-            </a:avLst>
-          </a:prstGeom>
-          <a:solidFill>
-            <a:schemeClr val="bg2"/>
-          </a:solidFill>
-          <a:ln/>
-        </p:spPr>
-      </p:sp>
-      <p:sp>
-        <p:nvSpPr>
-          <p:cNvPr id="8" name="Text 5"/>
-          <p:cNvSpPr txBox="1"/>
-          <p:nvPr/>
-        </p:nvSpPr>
-        <p:spPr>
-          <a:xfrm>
-            <a:off x="4566818" y="4754880"/>
-            <a:ext cx="3058058" cy="457200"/>
-          </a:xfrm>
-          <a:prstGeom prst="rect">
-            <a:avLst/>
-          </a:prstGeom>
-          <a:noFill/>
-          <a:ln/>
-        </p:spPr>
-        <p:txBody>
-          <a:bodyPr wrap="square" lIns="0" tIns="0" rIns="0" bIns="0" rtlCol="0" anchor="t"/>
-          <a:lstStyle/>
-          <a:p>
-            <a:pPr indent="0" marL="0">
-              <a:buNone/>
-            </a:pPr>
-            <a:r>
-              <a:rPr lang="en-US" sz="1800" b="1" dirty="0">
-                <a:solidFill>
-                  <a:schemeClr val="tx2"/>
-                </a:solidFill>
-              </a:rPr>
-              <a:t>コピーした図もまとめて</a:t>
-            </a:r>
-            <a:endParaRPr lang="en-US" sz="1800" dirty="0"/>
-          </a:p>
-        </p:txBody>
-      </p:sp>
-      <p:sp>
-        <p:nvSpPr>
-          <p:cNvPr id="9" name="Text 6"/>
-          <p:cNvSpPr txBox="1"/>
-          <p:nvPr/>
-        </p:nvSpPr>
-        <p:spPr>
-          <a:xfrm>
-            <a:off x="4566818" y="5257800"/>
-            <a:ext cx="3058058" cy="731520"/>
-          </a:xfrm>
-          <a:prstGeom prst="rect">
-            <a:avLst/>
-          </a:prstGeom>
-          <a:noFill/>
-          <a:ln/>
-        </p:spPr>
-        <p:txBody>
-          <a:bodyPr wrap="square" lIns="0" tIns="0" rIns="0" bIns="0" rtlCol="0" anchor="t"/>
-          <a:lstStyle/>
+              <a:rPr lang="en-US" sz="1500" dirty="0">
+                <a:solidFill>
+                  <a:schemeClr val="accent3"/>
+                </a:solidFill>
+              </a:rPr>
+              <a:t>ホームタブの右端に、この 3 つのボタンが並びます。</a:t>
+            </a:r>
+            <a:endParaRPr lang="en-US" sz="1500" dirty="0"/>
+          </a:p>
           <a:p>
             <a:pPr indent="0" marL="0">
               <a:spcAft>
@@ -5258,111 +7335,14 @@
               <a:buNone/>
             </a:pPr>
             <a:r>
-              <a:rPr lang="en-US" sz="1400" dirty="0">
-                <a:solidFill>
-                  <a:schemeClr val="tx1"/>
-                </a:solidFill>
-              </a:rPr>
-              <a:t>同じスライドの同じ id の図はすべて更新します。</a:t>
-            </a:r>
-            <a:endParaRPr lang="en-US" sz="1400" dirty="0"/>
-          </a:p>
-        </p:txBody>
-      </p:sp>
-      <p:sp>
-        <p:nvSpPr>
-          <p:cNvPr id="10" name="card"/>
-          <p:cNvSpPr/>
-          <p:nvPr/>
-        </p:nvSpPr>
-        <p:spPr>
-          <a:xfrm>
-            <a:off x="8127797" y="4572000"/>
-            <a:ext cx="3515258" cy="1600200"/>
-          </a:xfrm>
-          <a:prstGeom prst="roundRect">
-            <a:avLst>
-              <a:gd name="adj" fmla="val 6857"/>
-            </a:avLst>
-          </a:prstGeom>
-          <a:solidFill>
-            <a:schemeClr val="bg2"/>
-          </a:solidFill>
-          <a:ln/>
-        </p:spPr>
-      </p:sp>
-      <p:sp>
-        <p:nvSpPr>
-          <p:cNvPr id="11" name="Text 8"/>
-          <p:cNvSpPr txBox="1"/>
-          <p:nvPr/>
-        </p:nvSpPr>
-        <p:spPr>
-          <a:xfrm>
-            <a:off x="8356397" y="4754880"/>
-            <a:ext cx="3058058" cy="457200"/>
-          </a:xfrm>
-          <a:prstGeom prst="rect">
-            <a:avLst/>
-          </a:prstGeom>
-          <a:noFill/>
-          <a:ln/>
-        </p:spPr>
-        <p:txBody>
-          <a:bodyPr wrap="square" lIns="0" tIns="0" rIns="0" bIns="0" rtlCol="0" anchor="t"/>
-          <a:lstStyle/>
-          <a:p>
-            <a:pPr indent="0" marL="0">
-              <a:buNone/>
-            </a:pPr>
-            <a:r>
-              <a:rPr lang="en-US" sz="1800" b="1" dirty="0">
-                <a:solidFill>
-                  <a:schemeClr val="tx2"/>
-                </a:solidFill>
-              </a:rPr>
-              <a:t>消さない</a:t>
-            </a:r>
-            <a:endParaRPr lang="en-US" sz="1800" dirty="0"/>
-          </a:p>
-        </p:txBody>
-      </p:sp>
-      <p:sp>
-        <p:nvSpPr>
-          <p:cNvPr id="12" name="Text 9"/>
-          <p:cNvSpPr txBox="1"/>
-          <p:nvPr/>
-        </p:nvSpPr>
-        <p:spPr>
-          <a:xfrm>
-            <a:off x="8356397" y="5257800"/>
-            <a:ext cx="3058058" cy="731520"/>
-          </a:xfrm>
-          <a:prstGeom prst="rect">
-            <a:avLst/>
-          </a:prstGeom>
-          <a:noFill/>
-          <a:ln/>
-        </p:spPr>
-        <p:txBody>
-          <a:bodyPr wrap="square" lIns="0" tIns="0" rIns="0" bIns="0" rtlCol="0" anchor="t"/>
-          <a:lstStyle/>
-          <a:p>
-            <a:pPr indent="0" marL="0">
-              <a:spcAft>
-                <a:spcPts val="400"/>
-              </a:spcAft>
-              <a:buNone/>
-            </a:pPr>
-            <a:r>
-              <a:rPr lang="en-US" sz="1400" dirty="0">
-                <a:solidFill>
-                  <a:schemeClr val="tx1"/>
-                </a:solidFill>
-              </a:rPr>
-              <a:t>ノートから消したブロックの図は残し、「対応なし」と表示します。</a:t>
-            </a:r>
-            <a:endParaRPr lang="en-US" sz="1400" dirty="0"/>
+              <a:rPr lang="en-US" sz="1500" dirty="0">
+                <a:solidFill>
+                  <a:schemeClr val="accent3"/>
+                </a:solidFill>
+              </a:rPr>
+              <a:t>エラーがあるときは、パネルが自動で開いてノートの何行目かを表示します。</a:t>
+            </a:r>
+            <a:endParaRPr lang="en-US" sz="1500" dirty="0"/>
           </a:p>
         </p:txBody>
       </p:sp>
@@ -5468,32 +7448,51 @@
                   <a:schemeClr val="tx2"/>
                 </a:solidFill>
               </a:rPr>
-              <a:t>テーマを選べる</a:t>
+              <a:t>パネルで選べること</a:t>
             </a:r>
             <a:endParaRPr lang="en-US" sz="3200" dirty="0"/>
           </a:p>
         </p:txBody>
       </p:sp>
-      <p:sp>
-        <p:nvSpPr>
-          <p:cNvPr id="3" name="Shape 1"/>
+      <p:pic>
+        <p:nvPicPr>
+          <p:cNvPr id="3" name="Image 0" descr="画面: E-panel">    </p:cNvPr>
+          <p:cNvPicPr>
+            <a:picLocks noChangeAspect="1"/>
+          </p:cNvPicPr>
+          <p:nvPr/>
+        </p:nvPicPr>
+        <p:blipFill>
+          <a:blip r:embed="rId1"/>
+          <a:stretch>
+            <a:fillRect/>
+          </a:stretch>
+        </p:blipFill>
+        <p:spPr>
+          <a:xfrm>
+            <a:off x="548640" y="1313875"/>
+            <a:ext cx="6949440" cy="4870330"/>
+          </a:xfrm>
+          <a:prstGeom prst="rect">
+            <a:avLst/>
+          </a:prstGeom>
+        </p:spPr>
+      </p:pic>
+      <p:sp>
+        <p:nvSpPr>
+          <p:cNvPr id="4" name="Shape 1"/>
           <p:cNvSpPr/>
           <p:nvPr/>
         </p:nvSpPr>
         <p:spPr>
           <a:xfrm>
-            <a:off x="548640" y="1371600"/>
-            <a:ext cx="5364328" cy="2011680"/>
-          </a:xfrm>
-          <a:prstGeom prst="roundRect">
-            <a:avLst>
-              <a:gd name="adj" fmla="val 5455"/>
-            </a:avLst>
-          </a:prstGeom>
-          <a:solidFill>
-            <a:schemeClr val="bg1"/>
-          </a:solidFill>
-          <a:ln w="12700">
+            <a:off x="548640" y="1313875"/>
+            <a:ext cx="6949440" cy="4870330"/>
+          </a:xfrm>
+          <a:prstGeom prst="rect">
+            <a:avLst/>
+          </a:prstGeom>
+          <a:ln w="9525">
             <a:solidFill>
               <a:srgbClr val="CBD5E1"/>
             </a:solidFill>
@@ -5503,96 +7502,61 @@
       </p:sp>
       <p:sp>
         <p:nvSpPr>
-          <p:cNvPr id="4" name="Text 2"/>
-          <p:cNvSpPr txBox="1"/>
-          <p:nvPr/>
-        </p:nvSpPr>
-        <p:spPr>
-          <a:xfrm>
-            <a:off x="822960" y="1554480"/>
-            <a:ext cx="4815688" cy="365760"/>
-          </a:xfrm>
-          <a:prstGeom prst="rect">
-            <a:avLst/>
-          </a:prstGeom>
-          <a:noFill/>
-          <a:ln/>
-        </p:spPr>
-        <p:txBody>
-          <a:bodyPr wrap="square" lIns="0" tIns="0" rIns="0" bIns="0" rtlCol="0" anchor="ctr"/>
-          <a:lstStyle/>
-          <a:p>
-            <a:pPr indent="0" marL="0">
-              <a:buNone/>
-            </a:pPr>
-            <a:r>
-              <a:rPr lang="en-US" sz="1600" b="1" dirty="0">
-                <a:solidFill>
-                  <a:schemeClr val="tx2"/>
-                </a:solidFill>
-              </a:rPr>
-              <a:t>モダン（青）・既定</a:t>
-            </a:r>
-            <a:endParaRPr lang="en-US" sz="1600" dirty="0"/>
-          </a:p>
-        </p:txBody>
-      </p:sp>
-      <p:pic>
-        <p:nvPicPr>
-          <p:cNvPr id="5" name="テーマ見本" descr="テーマ見本: modern">    </p:cNvPr>
-          <p:cNvPicPr>
-            <a:picLocks noChangeAspect="1"/>
-          </p:cNvPicPr>
-          <p:nvPr/>
-        </p:nvPicPr>
-        <p:blipFill>
-          <a:blip r:embed="rId1">
-            <a:extLst>
-              <a:ext uri="{96DAC541-7B7A-43D3-8B79-37D633B846F1}">
-                <asvg:svgBlip xmlns:asvg="http://schemas.microsoft.com/office/drawing/2016/SVG/main" r:embed="rId7"/>
-              </a:ext>
-            </a:extLst>
-          </a:blip>
-          <a:stretch>
-            <a:fillRect/>
-          </a:stretch>
-        </p:blipFill>
-        <p:spPr>
-          <a:xfrm>
-            <a:off x="914400" y="2216033"/>
-            <a:ext cx="4632808" cy="780014"/>
-          </a:xfrm>
-          <a:prstGeom prst="rect">
-            <a:avLst/>
-          </a:prstGeom>
-        </p:spPr>
-      </p:pic>
-      <p:sp>
-        <p:nvSpPr>
-          <p:cNvPr id="6" name="Shape 3"/>
+          <p:cNvPr id="5" name="card"/>
           <p:cNvSpPr/>
           <p:nvPr/>
         </p:nvSpPr>
         <p:spPr>
           <a:xfrm>
-            <a:off x="6278728" y="1371600"/>
-            <a:ext cx="5364328" cy="2011680"/>
+            <a:off x="7863840" y="1325880"/>
+            <a:ext cx="3779215" cy="1508760"/>
           </a:xfrm>
           <a:prstGeom prst="roundRect">
             <a:avLst>
-              <a:gd name="adj" fmla="val 5455"/>
+              <a:gd name="adj" fmla="val 7273"/>
             </a:avLst>
           </a:prstGeom>
           <a:solidFill>
-            <a:schemeClr val="bg1"/>
+            <a:schemeClr val="bg2"/>
           </a:solidFill>
-          <a:ln w="12700">
-            <a:solidFill>
-              <a:srgbClr val="CBD5E1"/>
-            </a:solidFill>
-            <a:prstDash val="solid"/>
-          </a:ln>
-        </p:spPr>
+          <a:ln/>
+        </p:spPr>
+      </p:sp>
+      <p:sp>
+        <p:nvSpPr>
+          <p:cNvPr id="6" name="Text 3"/>
+          <p:cNvSpPr txBox="1"/>
+          <p:nvPr/>
+        </p:nvSpPr>
+        <p:spPr>
+          <a:xfrm>
+            <a:off x="8092440" y="1508760"/>
+            <a:ext cx="3322015" cy="457200"/>
+          </a:xfrm>
+          <a:prstGeom prst="rect">
+            <a:avLst/>
+          </a:prstGeom>
+          <a:noFill/>
+          <a:ln/>
+        </p:spPr>
+        <p:txBody>
+          <a:bodyPr wrap="square" lIns="0" tIns="0" rIns="0" bIns="0" rtlCol="0" anchor="t"/>
+          <a:lstStyle/>
+          <a:p>
+            <a:pPr indent="0" marL="0">
+              <a:buNone/>
+            </a:pPr>
+            <a:r>
+              <a:rPr lang="en-US" sz="1800" b="1" dirty="0">
+                <a:solidFill>
+                  <a:schemeClr val="tx2"/>
+                </a:solidFill>
+              </a:rPr>
+              <a:t>テーマ</a:t>
+            </a:r>
+            <a:endParaRPr lang="en-US" sz="1800" dirty="0"/>
+          </a:p>
+        </p:txBody>
       </p:sp>
       <p:sp>
         <p:nvSpPr>
@@ -5602,281 +7566,226 @@
         </p:nvSpPr>
         <p:spPr>
           <a:xfrm>
-            <a:off x="6553048" y="1554480"/>
-            <a:ext cx="4815688" cy="365760"/>
-          </a:xfrm>
-          <a:prstGeom prst="rect">
-            <a:avLst/>
-          </a:prstGeom>
-          <a:noFill/>
-          <a:ln/>
-        </p:spPr>
-        <p:txBody>
-          <a:bodyPr wrap="square" lIns="0" tIns="0" rIns="0" bIns="0" rtlCol="0" anchor="ctr"/>
-          <a:lstStyle/>
-          <a:p>
-            <a:pPr indent="0" marL="0">
-              <a:buNone/>
-            </a:pPr>
-            <a:r>
-              <a:rPr lang="en-US" sz="1600" b="1" dirty="0">
-                <a:solidFill>
-                  <a:schemeClr val="tx2"/>
-                </a:solidFill>
-              </a:rPr>
-              <a:t>モノトーン</a:t>
-            </a:r>
-            <a:endParaRPr lang="en-US" sz="1600" dirty="0"/>
-          </a:p>
-        </p:txBody>
-      </p:sp>
-      <p:pic>
-        <p:nvPicPr>
-          <p:cNvPr id="8" name="テーマ見本" descr="テーマ見本: mono">    </p:cNvPr>
-          <p:cNvPicPr>
-            <a:picLocks noChangeAspect="1"/>
-          </p:cNvPicPr>
-          <p:nvPr/>
-        </p:nvPicPr>
-        <p:blipFill>
-          <a:blip r:embed="rId2">
-            <a:extLst>
-              <a:ext uri="{96DAC541-7B7A-43D3-8B79-37D633B846F1}">
-                <asvg:svgBlip xmlns:asvg="http://schemas.microsoft.com/office/drawing/2016/SVG/main" r:embed="rId8"/>
-              </a:ext>
-            </a:extLst>
-          </a:blip>
-          <a:stretch>
-            <a:fillRect/>
-          </a:stretch>
-        </p:blipFill>
-        <p:spPr>
-          <a:xfrm>
-            <a:off x="6644488" y="2216033"/>
-            <a:ext cx="4632808" cy="780014"/>
-          </a:xfrm>
-          <a:prstGeom prst="rect">
-            <a:avLst/>
-          </a:prstGeom>
-        </p:spPr>
-      </p:pic>
-      <p:sp>
-        <p:nvSpPr>
-          <p:cNvPr id="9" name="Shape 5"/>
+            <a:off x="8092440" y="2011680"/>
+            <a:ext cx="3322015" cy="640080"/>
+          </a:xfrm>
+          <a:prstGeom prst="rect">
+            <a:avLst/>
+          </a:prstGeom>
+          <a:noFill/>
+          <a:ln/>
+        </p:spPr>
+        <p:txBody>
+          <a:bodyPr wrap="square" lIns="0" tIns="0" rIns="0" bIns="0" rtlCol="0" anchor="t"/>
+          <a:lstStyle/>
+          <a:p>
+            <a:pPr indent="0" marL="0">
+              <a:spcAft>
+                <a:spcPts val="400"/>
+              </a:spcAft>
+              <a:buNone/>
+            </a:pPr>
+            <a:r>
+              <a:rPr lang="en-US" sz="1400" dirty="0">
+                <a:solidFill>
+                  <a:schemeClr val="tx1"/>
+                </a:solidFill>
+              </a:rPr>
+              <a:t>モダン（既定）・モノトーン・ネイビー・テンプレートの色・カスタムなど。プレゼンごとに保存されます。</a:t>
+            </a:r>
+            <a:endParaRPr lang="en-US" sz="1400" dirty="0"/>
+          </a:p>
+        </p:txBody>
+      </p:sp>
+      <p:sp>
+        <p:nvSpPr>
+          <p:cNvPr id="8" name="card"/>
           <p:cNvSpPr/>
           <p:nvPr/>
         </p:nvSpPr>
         <p:spPr>
           <a:xfrm>
-            <a:off x="548640" y="3703320"/>
-            <a:ext cx="5364328" cy="2011680"/>
+            <a:off x="7863840" y="2971800"/>
+            <a:ext cx="3779215" cy="1508760"/>
           </a:xfrm>
           <a:prstGeom prst="roundRect">
             <a:avLst>
-              <a:gd name="adj" fmla="val 5455"/>
+              <a:gd name="adj" fmla="val 7273"/>
             </a:avLst>
           </a:prstGeom>
           <a:solidFill>
-            <a:schemeClr val="bg1"/>
+            <a:schemeClr val="bg2"/>
           </a:solidFill>
-          <a:ln w="12700">
-            <a:solidFill>
-              <a:srgbClr val="CBD5E1"/>
-            </a:solidFill>
-            <a:prstDash val="solid"/>
-          </a:ln>
-        </p:spPr>
-      </p:sp>
-      <p:sp>
-        <p:nvSpPr>
-          <p:cNvPr id="10" name="Text 6"/>
+          <a:ln/>
+        </p:spPr>
+      </p:sp>
+      <p:sp>
+        <p:nvSpPr>
+          <p:cNvPr id="9" name="Text 6"/>
           <p:cNvSpPr txBox="1"/>
           <p:nvPr/>
         </p:nvSpPr>
         <p:spPr>
           <a:xfrm>
-            <a:off x="822960" y="3886200"/>
-            <a:ext cx="4815688" cy="365760"/>
-          </a:xfrm>
-          <a:prstGeom prst="rect">
-            <a:avLst/>
-          </a:prstGeom>
-          <a:noFill/>
-          <a:ln/>
-        </p:spPr>
-        <p:txBody>
-          <a:bodyPr wrap="square" lIns="0" tIns="0" rIns="0" bIns="0" rtlCol="0" anchor="ctr"/>
-          <a:lstStyle/>
-          <a:p>
-            <a:pPr indent="0" marL="0">
-              <a:buNone/>
-            </a:pPr>
-            <a:r>
-              <a:rPr lang="en-US" sz="1600" b="1" dirty="0">
+            <a:off x="8092440" y="3154680"/>
+            <a:ext cx="3322015" cy="457200"/>
+          </a:xfrm>
+          <a:prstGeom prst="rect">
+            <a:avLst/>
+          </a:prstGeom>
+          <a:noFill/>
+          <a:ln/>
+        </p:spPr>
+        <p:txBody>
+          <a:bodyPr wrap="square" lIns="0" tIns="0" rIns="0" bIns="0" rtlCol="0" anchor="t"/>
+          <a:lstStyle/>
+          <a:p>
+            <a:pPr indent="0" marL="0">
+              <a:buNone/>
+            </a:pPr>
+            <a:r>
+              <a:rPr lang="en-US" sz="1800" b="1" dirty="0">
                 <a:solidFill>
                   <a:schemeClr val="tx2"/>
                 </a:solidFill>
               </a:rPr>
-              <a:t>ネイビー</a:t>
-            </a:r>
-            <a:endParaRPr lang="en-US" sz="1600" dirty="0"/>
-          </a:p>
-        </p:txBody>
-      </p:sp>
-      <p:pic>
-        <p:nvPicPr>
-          <p:cNvPr id="11" name="テーマ見本" descr="テーマ見本: navy">    </p:cNvPr>
-          <p:cNvPicPr>
-            <a:picLocks noChangeAspect="1"/>
-          </p:cNvPicPr>
-          <p:nvPr/>
-        </p:nvPicPr>
-        <p:blipFill>
-          <a:blip r:embed="rId3">
-            <a:extLst>
-              <a:ext uri="{96DAC541-7B7A-43D3-8B79-37D633B846F1}">
-                <asvg:svgBlip xmlns:asvg="http://schemas.microsoft.com/office/drawing/2016/SVG/main" r:embed="rId9"/>
-              </a:ext>
-            </a:extLst>
-          </a:blip>
-          <a:stretch>
-            <a:fillRect/>
-          </a:stretch>
-        </p:blipFill>
-        <p:spPr>
-          <a:xfrm>
-            <a:off x="914400" y="4547753"/>
-            <a:ext cx="4632808" cy="780014"/>
-          </a:xfrm>
-          <a:prstGeom prst="rect">
-            <a:avLst/>
-          </a:prstGeom>
-        </p:spPr>
-      </p:pic>
-      <p:sp>
-        <p:nvSpPr>
-          <p:cNvPr id="12" name="Shape 7"/>
+              <a:t>文字の大きさ</a:t>
+            </a:r>
+            <a:endParaRPr lang="en-US" sz="1800" dirty="0"/>
+          </a:p>
+        </p:txBody>
+      </p:sp>
+      <p:sp>
+        <p:nvSpPr>
+          <p:cNvPr id="10" name="Text 7"/>
+          <p:cNvSpPr txBox="1"/>
+          <p:nvPr/>
+        </p:nvSpPr>
+        <p:spPr>
+          <a:xfrm>
+            <a:off x="8092440" y="3657600"/>
+            <a:ext cx="3322015" cy="640080"/>
+          </a:xfrm>
+          <a:prstGeom prst="rect">
+            <a:avLst/>
+          </a:prstGeom>
+          <a:noFill/>
+          <a:ln/>
+        </p:spPr>
+        <p:txBody>
+          <a:bodyPr wrap="square" lIns="0" tIns="0" rIns="0" bIns="0" rtlCol="0" anchor="t"/>
+          <a:lstStyle/>
+          <a:p>
+            <a:pPr indent="0" marL="0">
+              <a:spcAft>
+                <a:spcPts val="400"/>
+              </a:spcAft>
+              <a:buNone/>
+            </a:pPr>
+            <a:r>
+              <a:rPr lang="en-US" sz="1400" dirty="0">
+                <a:solidFill>
+                  <a:schemeClr val="tx1"/>
+                </a:solidFill>
+              </a:rPr>
+              <a:t>10〜32pt（既定 14pt）。図ごとに変えるならノートに fontsize= を書きます。</a:t>
+            </a:r>
+            <a:endParaRPr lang="en-US" sz="1400" dirty="0"/>
+          </a:p>
+        </p:txBody>
+      </p:sp>
+      <p:sp>
+        <p:nvSpPr>
+          <p:cNvPr id="11" name="card"/>
           <p:cNvSpPr/>
           <p:nvPr/>
         </p:nvSpPr>
         <p:spPr>
           <a:xfrm>
-            <a:off x="6278728" y="3703320"/>
-            <a:ext cx="5364328" cy="2011680"/>
+            <a:off x="7863840" y="4617720"/>
+            <a:ext cx="3779215" cy="1508760"/>
           </a:xfrm>
           <a:prstGeom prst="roundRect">
             <a:avLst>
-              <a:gd name="adj" fmla="val 5455"/>
+              <a:gd name="adj" fmla="val 7273"/>
             </a:avLst>
           </a:prstGeom>
           <a:solidFill>
-            <a:schemeClr val="bg1"/>
+            <a:schemeClr val="bg2"/>
           </a:solidFill>
-          <a:ln w="12700">
-            <a:solidFill>
-              <a:srgbClr val="CBD5E1"/>
-            </a:solidFill>
-            <a:prstDash val="solid"/>
-          </a:ln>
-        </p:spPr>
-      </p:sp>
-      <p:sp>
-        <p:nvSpPr>
-          <p:cNvPr id="13" name="Text 8"/>
+          <a:ln/>
+        </p:spPr>
+      </p:sp>
+      <p:sp>
+        <p:nvSpPr>
+          <p:cNvPr id="12" name="Text 9"/>
           <p:cNvSpPr txBox="1"/>
           <p:nvPr/>
         </p:nvSpPr>
         <p:spPr>
           <a:xfrm>
-            <a:off x="6553048" y="3886200"/>
-            <a:ext cx="4815688" cy="365760"/>
-          </a:xfrm>
-          <a:prstGeom prst="rect">
-            <a:avLst/>
-          </a:prstGeom>
-          <a:noFill/>
-          <a:ln/>
-        </p:spPr>
-        <p:txBody>
-          <a:bodyPr wrap="square" lIns="0" tIns="0" rIns="0" bIns="0" rtlCol="0" anchor="ctr"/>
-          <a:lstStyle/>
-          <a:p>
-            <a:pPr indent="0" marL="0">
-              <a:buNone/>
-            </a:pPr>
-            <a:r>
-              <a:rPr lang="en-US" sz="1600" b="1" dirty="0">
+            <a:off x="8092440" y="4800600"/>
+            <a:ext cx="3322015" cy="457200"/>
+          </a:xfrm>
+          <a:prstGeom prst="rect">
+            <a:avLst/>
+          </a:prstGeom>
+          <a:noFill/>
+          <a:ln/>
+        </p:spPr>
+        <p:txBody>
+          <a:bodyPr wrap="square" lIns="0" tIns="0" rIns="0" bIns="0" rtlCol="0" anchor="t"/>
+          <a:lstStyle/>
+          <a:p>
+            <a:pPr indent="0" marL="0">
+              <a:buNone/>
+            </a:pPr>
+            <a:r>
+              <a:rPr lang="en-US" sz="1800" b="1" dirty="0">
                 <a:solidFill>
                   <a:schemeClr val="tx2"/>
                 </a:solidFill>
               </a:rPr>
-              <a:t>mermaid 標準（default）</a:t>
-            </a:r>
-            <a:endParaRPr lang="en-US" sz="1600" dirty="0"/>
-          </a:p>
-        </p:txBody>
-      </p:sp>
-      <p:pic>
-        <p:nvPicPr>
-          <p:cNvPr id="14" name="テーマ見本" descr="テーマ見本: default">    </p:cNvPr>
-          <p:cNvPicPr>
-            <a:picLocks noChangeAspect="1"/>
-          </p:cNvPicPr>
-          <p:nvPr/>
-        </p:nvPicPr>
-        <p:blipFill>
-          <a:blip r:embed="rId4">
-            <a:extLst>
-              <a:ext uri="{96DAC541-7B7A-43D3-8B79-37D633B846F1}">
-                <asvg:svgBlip xmlns:asvg="http://schemas.microsoft.com/office/drawing/2016/SVG/main" r:embed="rId10"/>
-              </a:ext>
-            </a:extLst>
-          </a:blip>
-          <a:stretch>
-            <a:fillRect/>
-          </a:stretch>
-        </p:blipFill>
-        <p:spPr>
-          <a:xfrm>
-            <a:off x="6644488" y="4547753"/>
-            <a:ext cx="4632808" cy="780014"/>
-          </a:xfrm>
-          <a:prstGeom prst="rect">
-            <a:avLst/>
-          </a:prstGeom>
-        </p:spPr>
-      </p:pic>
-      <p:sp>
-        <p:nvSpPr>
-          <p:cNvPr id="15" name="Text 9"/>
+              <a:t>サンプル</a:t>
+            </a:r>
+            <a:endParaRPr lang="en-US" sz="1800" dirty="0"/>
+          </a:p>
+        </p:txBody>
+      </p:sp>
+      <p:sp>
+        <p:nvSpPr>
+          <p:cNvPr id="13" name="Text 10"/>
           <p:cNvSpPr txBox="1"/>
           <p:nvPr/>
         </p:nvSpPr>
         <p:spPr>
           <a:xfrm>
-            <a:off x="548640" y="5897880"/>
-            <a:ext cx="11094415" cy="365760"/>
-          </a:xfrm>
-          <a:prstGeom prst="rect">
-            <a:avLst/>
-          </a:prstGeom>
-          <a:noFill/>
-          <a:ln/>
-        </p:spPr>
-        <p:txBody>
-          <a:bodyPr wrap="square" lIns="0" tIns="0" rIns="0" bIns="0" rtlCol="0" anchor="ctr"/>
-          <a:lstStyle/>
-          <a:p>
-            <a:pPr indent="0" marL="0">
+            <a:off x="8092440" y="5303520"/>
+            <a:ext cx="3322015" cy="640080"/>
+          </a:xfrm>
+          <a:prstGeom prst="rect">
+            <a:avLst/>
+          </a:prstGeom>
+          <a:noFill/>
+          <a:ln/>
+        </p:spPr>
+        <p:txBody>
+          <a:bodyPr wrap="square" lIns="0" tIns="0" rIns="0" bIns="0" rtlCol="0" anchor="t"/>
+          <a:lstStyle/>
+          <a:p>
+            <a:pPr indent="0" marL="0">
+              <a:spcAft>
+                <a:spcPts val="400"/>
+              </a:spcAft>
               <a:buNone/>
             </a:pPr>
             <a:r>
               <a:rPr lang="en-US" sz="1400" dirty="0">
                 <a:solidFill>
-                  <a:schemeClr val="accent3"/>
-                </a:solidFill>
-              </a:rPr>
-              <a:t>ほかに neutral / dark / forest。テーマはプレゼンごとに保存されます。</a:t>
+                  <a:schemeClr val="tx1"/>
+                </a:solidFill>
+              </a:rPr>
+              <a:t>主な図の最小構成。「コピー」でノートに貼れる形でコピーできます。</a:t>
             </a:r>
             <a:endParaRPr lang="en-US" sz="1400" dirty="0"/>
           </a:p>
@@ -5984,26 +7893,60 @@
                   <a:schemeClr val="tx2"/>
                 </a:solidFill>
               </a:rPr>
-              <a:t>知っておきたいこと</a:t>
+              <a:t>図はこう更新されます</a:t>
             </a:r>
             <a:endParaRPr lang="en-US" sz="3200" dirty="0"/>
           </a:p>
         </p:txBody>
       </p:sp>
-      <p:sp>
-        <p:nvSpPr>
-          <p:cNvPr id="3" name="card"/>
+      <p:pic>
+        <p:nvPicPr>
+          <p:cNvPr id="3" name="Mermaid: update" descr="flowchart LR&#10;  N[&quot;ノートの&lt;br/&gt;mermaid ブロック&quot;] --&gt; Q1{&quot;同じ id の図が&lt;br/&gt;ある？&quot;}&#10;  Q1 -- ない --&gt; ADD[&quot;新しく図を入れる&quot;]&#10;  Q1 -- ある --&gt; Q2{&quot;コード・テーマ・&lt;br/&gt;大きさが前と同じ？&quot;}&#10;  Q2 -- 同じ --&gt; KEEP[&quot;何もしない&quot;]&#10;  Q2 -- 違う --&gt; REP[&quot;位置と大きさを保って&lt;br/&gt;置き換える&quot;]" title="Mermaid: update">    </p:cNvPr>
+          <p:cNvPicPr>
+            <a:picLocks noChangeAspect="1"/>
+          </p:cNvPicPr>
+          <p:nvPr>
+            <p:custDataLst>
+              <p:tags r:id="rId5"/>
+            </p:custDataLst>
+          </p:nvPr>
+        </p:nvPicPr>
+        <p:blipFill>
+          <a:blip r:embed="rId1">
+            <a:extLst>
+              <a:ext uri="{96DAC541-7B7A-43D3-8B79-37D633B846F1}">
+                <asvg:svgBlip xmlns:asvg="http://schemas.microsoft.com/office/drawing/2016/SVG/main" r:embed="rId4"/>
+              </a:ext>
+            </a:extLst>
+          </a:blip>
+          <a:stretch>
+            <a:fillRect/>
+          </a:stretch>
+        </p:blipFill>
+        <p:spPr>
+          <a:xfrm>
+            <a:off x="1190705" y="1325880"/>
+            <a:ext cx="9810285" cy="3108960"/>
+          </a:xfrm>
+          <a:prstGeom prst="rect">
+            <a:avLst/>
+          </a:prstGeom>
+        </p:spPr>
+      </p:pic>
+      <p:sp>
+        <p:nvSpPr>
+          <p:cNvPr id="4" name="card"/>
           <p:cNvSpPr/>
           <p:nvPr/>
         </p:nvSpPr>
         <p:spPr>
           <a:xfrm>
-            <a:off x="548640" y="1417320"/>
-            <a:ext cx="5364328" cy="2011680"/>
+            <a:off x="548640" y="4572000"/>
+            <a:ext cx="3515258" cy="1600200"/>
           </a:xfrm>
           <a:prstGeom prst="roundRect">
             <a:avLst>
-              <a:gd name="adj" fmla="val 5455"/>
+              <a:gd name="adj" fmla="val 6857"/>
             </a:avLst>
           </a:prstGeom>
           <a:solidFill>
@@ -6014,14 +7957,14 @@
       </p:sp>
       <p:sp>
         <p:nvSpPr>
-          <p:cNvPr id="4" name="Text 2"/>
+          <p:cNvPr id="5" name="Text 2"/>
           <p:cNvSpPr txBox="1"/>
           <p:nvPr/>
         </p:nvSpPr>
         <p:spPr>
           <a:xfrm>
-            <a:off x="777240" y="1600200"/>
-            <a:ext cx="4907128" cy="457200"/>
+            <a:off x="777240" y="4754880"/>
+            <a:ext cx="3058058" cy="457200"/>
           </a:xfrm>
           <a:prstGeom prst="rect">
             <a:avLst/>
@@ -6042,7 +7985,7 @@
                   <a:schemeClr val="tx2"/>
                 </a:solidFill>
               </a:rPr>
-              <a:t>対応環境</a:t>
+              <a:t>何度押しても安心</a:t>
             </a:r>
             <a:endParaRPr lang="en-US" sz="1800" dirty="0"/>
           </a:p>
@@ -6050,14 +7993,14 @@
       </p:sp>
       <p:sp>
         <p:nvSpPr>
-          <p:cNvPr id="5" name="Text 3"/>
+          <p:cNvPr id="6" name="Text 3"/>
           <p:cNvSpPr txBox="1"/>
           <p:nvPr/>
         </p:nvSpPr>
         <p:spPr>
           <a:xfrm>
-            <a:off x="777240" y="2103120"/>
-            <a:ext cx="4907128" cy="1143000"/>
+            <a:off x="777240" y="5257800"/>
+            <a:ext cx="3058058" cy="731520"/>
           </a:xfrm>
           <a:prstGeom prst="rect">
             <a:avLst/>
@@ -6081,7 +8024,7 @@
                   <a:schemeClr val="tx1"/>
                 </a:solidFill>
               </a:rPr>
-              <a:t>Windows 版 PowerPoint（Microsoft 365）で確認しています。Mac・Web 版は未確認です。</a:t>
+              <a:t>変更が無い図には触りません。</a:t>
             </a:r>
             <a:endParaRPr lang="en-US" sz="1400" dirty="0"/>
           </a:p>
@@ -6089,18 +8032,18 @@
       </p:sp>
       <p:sp>
         <p:nvSpPr>
-          <p:cNvPr id="6" name="card"/>
+          <p:cNvPr id="7" name="card"/>
           <p:cNvSpPr/>
           <p:nvPr/>
         </p:nvSpPr>
         <p:spPr>
           <a:xfrm>
-            <a:off x="6278728" y="1417320"/>
-            <a:ext cx="5364328" cy="2011680"/>
+            <a:off x="4338218" y="4572000"/>
+            <a:ext cx="3515258" cy="1600200"/>
           </a:xfrm>
           <a:prstGeom prst="roundRect">
             <a:avLst>
-              <a:gd name="adj" fmla="val 5455"/>
+              <a:gd name="adj" fmla="val 6857"/>
             </a:avLst>
           </a:prstGeom>
           <a:solidFill>
@@ -6111,14 +8054,14 @@
       </p:sp>
       <p:sp>
         <p:nvSpPr>
-          <p:cNvPr id="7" name="Text 5"/>
+          <p:cNvPr id="8" name="Text 5"/>
           <p:cNvSpPr txBox="1"/>
           <p:nvPr/>
         </p:nvSpPr>
         <p:spPr>
           <a:xfrm>
-            <a:off x="6507328" y="1600200"/>
-            <a:ext cx="4907128" cy="457200"/>
+            <a:off x="4566818" y="4754880"/>
+            <a:ext cx="3058058" cy="457200"/>
           </a:xfrm>
           <a:prstGeom prst="rect">
             <a:avLst/>
@@ -6139,7 +8082,7 @@
                   <a:schemeClr val="tx2"/>
                 </a:solidFill>
               </a:rPr>
-              <a:t>図は画像</a:t>
+              <a:t>コピーした図もまとめて</a:t>
             </a:r>
             <a:endParaRPr lang="en-US" sz="1800" dirty="0"/>
           </a:p>
@@ -6147,14 +8090,14 @@
       </p:sp>
       <p:sp>
         <p:nvSpPr>
-          <p:cNvPr id="8" name="Text 6"/>
+          <p:cNvPr id="9" name="Text 6"/>
           <p:cNvSpPr txBox="1"/>
           <p:nvPr/>
         </p:nvSpPr>
         <p:spPr>
           <a:xfrm>
-            <a:off x="6507328" y="2103120"/>
-            <a:ext cx="4907128" cy="1143000"/>
+            <a:off x="4566818" y="5257800"/>
+            <a:ext cx="3058058" cy="731520"/>
           </a:xfrm>
           <a:prstGeom prst="rect">
             <a:avLst/>
@@ -6178,7 +8121,7 @@
                   <a:schemeClr val="tx1"/>
                 </a:solidFill>
               </a:rPr>
-              <a:t>PowerPoint の図形として部分的に編集はできません。直すときはノートを直します。</a:t>
+              <a:t>同じスライドの同じ id の図はすべて更新します。</a:t>
             </a:r>
             <a:endParaRPr lang="en-US" sz="1400" dirty="0"/>
           </a:p>
@@ -6186,18 +8129,18 @@
       </p:sp>
       <p:sp>
         <p:nvSpPr>
-          <p:cNvPr id="9" name="card"/>
+          <p:cNvPr id="10" name="card"/>
           <p:cNvSpPr/>
           <p:nvPr/>
         </p:nvSpPr>
         <p:spPr>
           <a:xfrm>
-            <a:off x="548640" y="3703320"/>
-            <a:ext cx="5364328" cy="2011680"/>
+            <a:off x="8127797" y="4572000"/>
+            <a:ext cx="3515258" cy="1600200"/>
           </a:xfrm>
           <a:prstGeom prst="roundRect">
             <a:avLst>
-              <a:gd name="adj" fmla="val 5455"/>
+              <a:gd name="adj" fmla="val 6857"/>
             </a:avLst>
           </a:prstGeom>
           <a:solidFill>
@@ -6208,14 +8151,14 @@
       </p:sp>
       <p:sp>
         <p:nvSpPr>
-          <p:cNvPr id="10" name="Text 8"/>
+          <p:cNvPr id="11" name="Text 8"/>
           <p:cNvSpPr txBox="1"/>
           <p:nvPr/>
         </p:nvSpPr>
         <p:spPr>
           <a:xfrm>
-            <a:off x="777240" y="3886200"/>
-            <a:ext cx="4907128" cy="457200"/>
+            <a:off x="8356397" y="4754880"/>
+            <a:ext cx="3058058" cy="457200"/>
           </a:xfrm>
           <a:prstGeom prst="rect">
             <a:avLst/>
@@ -6236,7 +8179,7 @@
                   <a:schemeClr val="tx2"/>
                 </a:solidFill>
               </a:rPr>
-              <a:t>余白はクリックできない</a:t>
+              <a:t>消さない</a:t>
             </a:r>
             <a:endParaRPr lang="en-US" sz="1800" dirty="0"/>
           </a:p>
@@ -6244,14 +8187,14 @@
       </p:sp>
       <p:sp>
         <p:nvSpPr>
-          <p:cNvPr id="11" name="Text 9"/>
+          <p:cNvPr id="12" name="Text 9"/>
           <p:cNvSpPr txBox="1"/>
           <p:nvPr/>
         </p:nvSpPr>
         <p:spPr>
           <a:xfrm>
-            <a:off x="777240" y="4389120"/>
-            <a:ext cx="4907128" cy="1143000"/>
+            <a:off x="8356397" y="5257800"/>
+            <a:ext cx="3058058" cy="731520"/>
           </a:xfrm>
           <a:prstGeom prst="rect">
             <a:avLst/>
@@ -6275,104 +8218,7 @@
                   <a:schemeClr val="tx1"/>
                 </a:solidFill>
               </a:rPr>
-              <a:t>図を選ぶときは、線や文字の部分をクリックしてください。</a:t>
-            </a:r>
-            <a:endParaRPr lang="en-US" sz="1400" dirty="0"/>
-          </a:p>
-        </p:txBody>
-      </p:sp>
-      <p:sp>
-        <p:nvSpPr>
-          <p:cNvPr id="12" name="card"/>
-          <p:cNvSpPr/>
-          <p:nvPr/>
-        </p:nvSpPr>
-        <p:spPr>
-          <a:xfrm>
-            <a:off x="6278728" y="3703320"/>
-            <a:ext cx="5364328" cy="2011680"/>
-          </a:xfrm>
-          <a:prstGeom prst="roundRect">
-            <a:avLst>
-              <a:gd name="adj" fmla="val 5455"/>
-            </a:avLst>
-          </a:prstGeom>
-          <a:solidFill>
-            <a:schemeClr val="bg2"/>
-          </a:solidFill>
-          <a:ln/>
-        </p:spPr>
-      </p:sp>
-      <p:sp>
-        <p:nvSpPr>
-          <p:cNvPr id="13" name="Text 11"/>
-          <p:cNvSpPr txBox="1"/>
-          <p:nvPr/>
-        </p:nvSpPr>
-        <p:spPr>
-          <a:xfrm>
-            <a:off x="6507328" y="3886200"/>
-            <a:ext cx="4907128" cy="457200"/>
-          </a:xfrm>
-          <a:prstGeom prst="rect">
-            <a:avLst/>
-          </a:prstGeom>
-          <a:noFill/>
-          <a:ln/>
-        </p:spPr>
-        <p:txBody>
-          <a:bodyPr wrap="square" lIns="0" tIns="0" rIns="0" bIns="0" rtlCol="0" anchor="t"/>
-          <a:lstStyle/>
-          <a:p>
-            <a:pPr indent="0" marL="0">
-              <a:buNone/>
-            </a:pPr>
-            <a:r>
-              <a:rPr lang="en-US" sz="1800" b="1" dirty="0">
-                <a:solidFill>
-                  <a:schemeClr val="tx2"/>
-                </a:solidFill>
-              </a:rPr>
-              <a:t>「アドイン エラー」と出たら</a:t>
-            </a:r>
-            <a:endParaRPr lang="en-US" sz="1800" dirty="0"/>
-          </a:p>
-        </p:txBody>
-      </p:sp>
-      <p:sp>
-        <p:nvSpPr>
-          <p:cNvPr id="14" name="Text 12"/>
-          <p:cNvSpPr txBox="1"/>
-          <p:nvPr/>
-        </p:nvSpPr>
-        <p:spPr>
-          <a:xfrm>
-            <a:off x="6507328" y="4389120"/>
-            <a:ext cx="4907128" cy="1143000"/>
-          </a:xfrm>
-          <a:prstGeom prst="rect">
-            <a:avLst/>
-          </a:prstGeom>
-          <a:noFill/>
-          <a:ln/>
-        </p:spPr>
-        <p:txBody>
-          <a:bodyPr wrap="square" lIns="0" tIns="0" rIns="0" bIns="0" rtlCol="0" anchor="t"/>
-          <a:lstStyle/>
-          <a:p>
-            <a:pPr indent="0" marL="0">
-              <a:spcAft>
-                <a:spcPts val="400"/>
-              </a:spcAft>
-              <a:buNone/>
-            </a:pPr>
-            <a:r>
-              <a:rPr lang="en-US" sz="1400" dirty="0">
-                <a:solidFill>
-                  <a:schemeClr val="tx1"/>
-                </a:solidFill>
-              </a:rPr>
-              <a:t>アドインを読み込めなかったときの表示です。図とノートはそのまま残っています。</a:t>
+              <a:t>ノートから消したブロックの図は残し、「対応なし」と表示します。</a:t>
             </a:r>
             <a:endParaRPr lang="en-US" sz="1400" dirty="0"/>
           </a:p>
@@ -6456,8 +8302,8 @@
 <file path=ppt/tags/tag3.xml><?xml version="1.0" encoding="utf-8"?>
 <p:tagLst xmlns:p="http://schemas.openxmlformats.org/presentationml/2006/main">
   <p:tag name="M4P_ID" val="update"/>
-  <p:tag name="M4P_SRC" val="flowchart LR&#10;  N[&quot;ノートの&lt;br/&gt;mermaid ブロック&quot;] --&gt; Q1{&quot;同じ id の図が&lt;br/&gt;ある？&quot;}&#10;  Q1 -- ない --&gt; ADD[&quot;新しく図を入れる&quot;]&#10;  Q1 -- ある --&gt; Q2{&quot;コードとテーマが&lt;br/&gt;前と同じ？&quot;}&#10;  Q2 -- 同じ --&gt; KEEP[&quot;何もしない&quot;]&#10;  Q2 -- 違う --&gt; REP[&quot;位置と横幅を保って&lt;br/&gt;置き換える&quot;]"/>
-  <p:tag name="M4P_HASH" val="dcf5ae1a4d61d19c"/>
+  <p:tag name="M4P_SRC" val="flowchart LR&#10;  N[&quot;ノートの&lt;br/&gt;mermaid ブロック&quot;] --&gt; Q1{&quot;同じ id の図が&lt;br/&gt;ある？&quot;}&#10;  Q1 -- ない --&gt; ADD[&quot;新しく図を入れる&quot;]&#10;  Q1 -- ある --&gt; Q2{&quot;コード・テーマ・&lt;br/&gt;大きさが前と同じ？&quot;}&#10;  Q2 -- 同じ --&gt; KEEP[&quot;何もしない&quot;]&#10;  Q2 -- 違う --&gt; REP[&quot;位置と大きさを保って&lt;br/&gt;置き換える&quot;]"/>
+  <p:tag name="M4P_HASH" val="e991a24a411a8db9"/>
   <p:tag name="M4P_VER" val="1"/>
   <p:tag name="M4P_MERMAID" val="11.12.0"/>
   <p:tag name="M4P_THEME" val="modern"/>
